--- a/blitzy/presentations/ArduPilot_PNT_Reference_Audit_Executive_Brief.pptx
+++ b/blitzy/presentations/ArduPilot_PNT_Reference_Audit_Executive_Brief.pptx
@@ -869,7 +869,7 @@
         <p:spPr>
           <a:xfrm>
             <a:off x="566928" y="2159355"/>
-            <a:ext cx="9144000" cy="1912315"/>
+            <a:ext cx="8412480" cy="1912315"/>
           </a:xfrm>
           <a:prstGeom prst="rect">
             <a:avLst/>
@@ -1419,7 +1419,7 @@
         <p:spPr>
           <a:xfrm>
             <a:off x="713232" y="2077783"/>
-            <a:ext cx="10911840" cy="589076"/>
+            <a:ext cx="8494776" cy="589076"/>
           </a:xfrm>
           <a:prstGeom prst="rect">
             <a:avLst/>
@@ -1447,7 +1447,7 @@
                 </a:solidFill>
                 <a:latin typeface="Inter"/>
               </a:rPr>
-              <a:t>PNT behavior in ArduPilot is not a library that a host can call — it is embedded in the vehicle flight loop and duplicated across vehicles.</a:t>
+              <a:t>“PNT behavior in ArduPilot is not a library that a host can call — it is embedded in the vehicle flight loop and duplicated across vehicles.”</a:t>
             </a:r>
           </a:p>
         </p:txBody>
@@ -1505,7 +1505,7 @@
         <p:spPr>
           <a:xfrm>
             <a:off x="713232" y="2740011"/>
-            <a:ext cx="10911840" cy="589076"/>
+            <a:ext cx="8494776" cy="589076"/>
           </a:xfrm>
           <a:prstGeom prst="rect">
             <a:avLst/>
@@ -1533,7 +1533,7 @@
                 </a:solidFill>
                 <a:latin typeface="Inter"/>
               </a:rPr>
-              <a:t>The consequence is that an external host cannot reuse a PNT behavior without first knowing every place that behavior lives, what it reads, and what breaks if it moves.</a:t>
+              <a:t>“The consequence is that an external host cannot reuse a PNT behavior without first knowing every place that behavior lives, what it reads, and what breaks if it moves.”</a:t>
             </a:r>
           </a:p>
         </p:txBody>
@@ -2419,7 +2419,7 @@
                 </a:solidFill>
                 <a:latin typeface="Inter"/>
               </a:rPr>
-              <a:t>The pattern, not the rows: many producers, one shared structure at the centre.</a:t>
+              <a:t>The pattern, not the rows: many producers, one shared structure.</a:t>
             </a:r>
           </a:p>
         </p:txBody>
@@ -2467,7 +2467,7 @@
                 </a:solidFill>
                 <a:latin typeface="Inter"/>
               </a:rPr>
-              <a:t>Fan-in, not a hierarchy: 14 receiver backends write one shared structure.</a:t>
+              <a:t>Fan-in, not a hierarchy: every backend writes one shared structure.</a:t>
             </a:r>
           </a:p>
           <a:p>
@@ -2524,56 +2524,14 @@
       </p:sp>
       <p:sp>
         <p:nvSpPr>
-          <p:cNvPr id="7" name="TextBox 6"/>
-          <p:cNvSpPr txBox="1"/>
+          <p:cNvPr id="7" name="Rounded Rectangle 6"/>
+          <p:cNvSpPr/>
           <p:nvPr/>
         </p:nvSpPr>
         <p:spPr>
           <a:xfrm>
             <a:off x="566928" y="3191675"/>
-            <a:ext cx="11058144" cy="225704"/>
-          </a:xfrm>
-          <a:prstGeom prst="rect">
-            <a:avLst/>
-          </a:prstGeom>
-          <a:noFill/>
-        </p:spPr>
-        <p:txBody>
-          <a:bodyPr wrap="square" lIns="0" rIns="0" tIns="0" bIns="0" anchor="t">
-            <a:noAutofit/>
-          </a:bodyPr>
-          <a:lstStyle/>
-          <a:p>
-            <a:pPr algn="l">
-              <a:lnSpc>
-                <a:spcPct val="100000"/>
-              </a:lnSpc>
-              <a:spcAft>
-                <a:spcPts val="300"/>
-              </a:spcAft>
-            </a:pPr>
-            <a:r>
-              <a:rPr sz="1200" b="0">
-                <a:solidFill>
-                  <a:srgbClr val="999999"/>
-                </a:solidFill>
-                <a:latin typeface="Fira Code"/>
-              </a:rPr>
-              <a:t>EACH CARD: THAT FINDING’S OWN NOTES FLAGS, THEN THE AUDIT’S OWN WORDING</a:t>
-            </a:r>
-          </a:p>
-        </p:txBody>
-      </p:sp>
-      <p:sp>
-        <p:nvSpPr>
-          <p:cNvPr id="8" name="Rounded Rectangle 7"/>
-          <p:cNvSpPr/>
-          <p:nvPr/>
-        </p:nvSpPr>
-        <p:spPr>
-          <a:xfrm>
-            <a:off x="566928" y="3417379"/>
-            <a:ext cx="5396484" cy="1183080"/>
+            <a:ext cx="11058144" cy="728471"/>
           </a:xfrm>
           <a:prstGeom prst="roundRect">
             <a:avLst>
@@ -2614,14 +2572,56 @@
       </p:sp>
       <p:sp>
         <p:nvSpPr>
+          <p:cNvPr id="8" name="TextBox 7"/>
+          <p:cNvSpPr txBox="1"/>
+          <p:nvPr/>
+        </p:nvSpPr>
+        <p:spPr>
+          <a:xfrm>
+            <a:off x="713232" y="3337979"/>
+            <a:ext cx="10765536" cy="187604"/>
+          </a:xfrm>
+          <a:prstGeom prst="rect">
+            <a:avLst/>
+          </a:prstGeom>
+          <a:noFill/>
+        </p:spPr>
+        <p:txBody>
+          <a:bodyPr wrap="square" lIns="0" rIns="0" tIns="0" bIns="0" anchor="t">
+            <a:noAutofit/>
+          </a:bodyPr>
+          <a:lstStyle/>
+          <a:p>
+            <a:pPr algn="l">
+              <a:lnSpc>
+                <a:spcPct val="120000"/>
+              </a:lnSpc>
+              <a:spcAft>
+                <a:spcPts val="0"/>
+              </a:spcAft>
+            </a:pPr>
+            <a:r>
+              <a:rPr sz="1200" b="0">
+                <a:solidFill>
+                  <a:srgbClr val="5B39F3"/>
+                </a:solidFill>
+                <a:latin typeface="Fira Code"/>
+              </a:rPr>
+              <a:t>FROM THE AUDIT’S FOOTPRINT SUMMARY</a:t>
+            </a:r>
+          </a:p>
+        </p:txBody>
+      </p:sp>
+      <p:sp>
+        <p:nvSpPr>
           <p:cNvPr id="9" name="TextBox 8"/>
           <p:cNvSpPr txBox="1"/>
           <p:nvPr/>
         </p:nvSpPr>
         <p:spPr>
           <a:xfrm>
-            <a:off x="713232" y="3563683"/>
-            <a:ext cx="5103876" cy="187604"/>
+            <a:off x="713232" y="3589591"/>
+            <a:ext cx="10765536" cy="184251"/>
           </a:xfrm>
           <a:prstGeom prst="rect">
             <a:avLst/>
@@ -2636,10 +2636,52 @@
           <a:p>
             <a:pPr algn="l">
               <a:lnSpc>
+                <a:spcPct val="120000"/>
+              </a:lnSpc>
+              <a:spcAft>
+                <a:spcPts val="0"/>
+              </a:spcAft>
+            </a:pPr>
+            <a:r>
+              <a:rPr sz="1200" b="0">
+                <a:solidFill>
+                  <a:srgbClr val="999999"/>
+                </a:solidFill>
+                <a:latin typeface="Inter"/>
+              </a:rPr>
+              <a:t>“44 files (14 receiver backends each catalogued individually + AP_GPS_Blended + GPS_Backend base)”</a:t>
+            </a:r>
+          </a:p>
+        </p:txBody>
+      </p:sp>
+      <p:sp>
+        <p:nvSpPr>
+          <p:cNvPr id="10" name="TextBox 9"/>
+          <p:cNvSpPr txBox="1"/>
+          <p:nvPr/>
+        </p:nvSpPr>
+        <p:spPr>
+          <a:xfrm>
+            <a:off x="566928" y="4066450"/>
+            <a:ext cx="11058144" cy="225704"/>
+          </a:xfrm>
+          <a:prstGeom prst="rect">
+            <a:avLst/>
+          </a:prstGeom>
+          <a:noFill/>
+        </p:spPr>
+        <p:txBody>
+          <a:bodyPr wrap="square" lIns="0" rIns="0" tIns="0" bIns="0" anchor="t">
+            <a:noAutofit/>
+          </a:bodyPr>
+          <a:lstStyle/>
+          <a:p>
+            <a:pPr algn="l">
+              <a:lnSpc>
                 <a:spcPct val="100000"/>
               </a:lnSpc>
               <a:spcAft>
-                <a:spcPts val="0"/>
+                <a:spcPts val="300"/>
               </a:spcAft>
             </a:pPr>
             <a:r>
@@ -2649,29 +2691,29 @@
                 </a:solidFill>
                 <a:latin typeface="Fira Code"/>
               </a:rPr>
-              <a:t>THE SHARED GPS STATE STRUCT</a:t>
-            </a:r>
-          </a:p>
-        </p:txBody>
-      </p:sp>
-      <p:sp>
-        <p:nvSpPr>
-          <p:cNvPr id="10" name="Rounded Rectangle 9"/>
+              <a:t>EACH CARD: THAT FINDING’S OWN NOTES FLAGS, THEN THE AUDIT’S OWN WORDING</a:t>
+            </a:r>
+          </a:p>
+        </p:txBody>
+      </p:sp>
+      <p:sp>
+        <p:nvSpPr>
+          <p:cNvPr id="11" name="Rounded Rectangle 10"/>
           <p:cNvSpPr/>
           <p:nvPr/>
         </p:nvSpPr>
         <p:spPr>
           <a:xfrm>
-            <a:off x="713232" y="3842727"/>
-            <a:ext cx="1607593" cy="274320"/>
+            <a:off x="566928" y="4356162"/>
+            <a:ext cx="5396484" cy="1183080"/>
           </a:xfrm>
           <a:prstGeom prst="roundRect">
             <a:avLst>
-              <a:gd name="adj" fmla="val 28000"/>
+              <a:gd name="adj" fmla="val 6000"/>
             </a:avLst>
           </a:prstGeom>
           <a:solidFill>
-            <a:srgbClr val="FFFFFF"/>
+            <a:srgbClr val="F2F0FE"/>
           </a:solidFill>
           <a:ln w="9525">
             <a:solidFill>
@@ -2695,38 +2737,65 @@
           </a:fontRef>
         </p:style>
         <p:txBody>
-          <a:bodyPr rtlCol="0" anchor="ctr" wrap="none" lIns="45720" rIns="45720" tIns="0" bIns="0">
-            <a:noAutofit/>
-          </a:bodyPr>
-          <a:lstStyle/>
-          <a:p>
-            <a:pPr algn="ctr">
+          <a:bodyPr rtlCol="0" anchor="ctr"/>
+          <a:lstStyle/>
+          <a:p>
+            <a:pPr algn="ctr"/>
+          </a:p>
+        </p:txBody>
+      </p:sp>
+      <p:sp>
+        <p:nvSpPr>
+          <p:cNvPr id="12" name="TextBox 11"/>
+          <p:cNvSpPr txBox="1"/>
+          <p:nvPr/>
+        </p:nvSpPr>
+        <p:spPr>
+          <a:xfrm>
+            <a:off x="713232" y="4502466"/>
+            <a:ext cx="5103876" cy="187604"/>
+          </a:xfrm>
+          <a:prstGeom prst="rect">
+            <a:avLst/>
+          </a:prstGeom>
+          <a:noFill/>
+        </p:spPr>
+        <p:txBody>
+          <a:bodyPr wrap="square" lIns="0" rIns="0" tIns="0" bIns="0" anchor="t">
+            <a:noAutofit/>
+          </a:bodyPr>
+          <a:lstStyle/>
+          <a:p>
+            <a:pPr algn="l">
               <a:lnSpc>
                 <a:spcPct val="100000"/>
               </a:lnSpc>
+              <a:spcAft>
+                <a:spcPts val="0"/>
+              </a:spcAft>
             </a:pPr>
             <a:r>
               <a:rPr sz="1200" b="0">
                 <a:solidFill>
-                  <a:srgbClr val="5B39F3"/>
+                  <a:srgbClr val="999999"/>
                 </a:solidFill>
                 <a:latin typeface="Fira Code"/>
               </a:rPr>
-              <a:t>[SHARED-STRUCT]</a:t>
-            </a:r>
-          </a:p>
-        </p:txBody>
-      </p:sp>
-      <p:sp>
-        <p:nvSpPr>
-          <p:cNvPr id="11" name="Rounded Rectangle 10"/>
+              <a:t>THE SHARED GPS STATE STRUCT</a:t>
+            </a:r>
+          </a:p>
+        </p:txBody>
+      </p:sp>
+      <p:sp>
+        <p:nvSpPr>
+          <p:cNvPr id="13" name="Rounded Rectangle 12"/>
           <p:cNvSpPr/>
           <p:nvPr/>
         </p:nvSpPr>
         <p:spPr>
           <a:xfrm>
-            <a:off x="2439697" y="3842727"/>
-            <a:ext cx="1701355" cy="274320"/>
+            <a:off x="713232" y="4781510"/>
+            <a:ext cx="1607593" cy="274320"/>
           </a:xfrm>
           <a:prstGeom prst="roundRect">
             <a:avLst>
@@ -2775,93 +2844,7 @@
                 </a:solidFill>
                 <a:latin typeface="Fira Code"/>
               </a:rPr>
-              <a:t>[MULTI-CATEGORY]</a:t>
-            </a:r>
-          </a:p>
-        </p:txBody>
-      </p:sp>
-      <p:sp>
-        <p:nvSpPr>
-          <p:cNvPr id="12" name="Rectangle 11"/>
-          <p:cNvSpPr/>
-          <p:nvPr/>
-        </p:nvSpPr>
-        <p:spPr>
-          <a:xfrm>
-            <a:off x="713232" y="4208487"/>
-            <a:ext cx="32004" cy="245668"/>
-          </a:xfrm>
-          <a:prstGeom prst="rect">
-            <a:avLst/>
-          </a:prstGeom>
-          <a:solidFill>
-            <a:srgbClr val="5B39F3"/>
-          </a:solidFill>
-          <a:ln>
-            <a:noFill/>
-          </a:ln>
-          <a:effectLst/>
-        </p:spPr>
-        <p:style>
-          <a:lnRef idx="1">
-            <a:schemeClr val="accent1"/>
-          </a:lnRef>
-          <a:fillRef idx="3">
-            <a:schemeClr val="accent1"/>
-          </a:fillRef>
-          <a:effectRef idx="0">
-            <a:schemeClr val="accent1"/>
-          </a:effectRef>
-          <a:fontRef idx="minor">
-            <a:schemeClr val="lt1"/>
-          </a:fontRef>
-        </p:style>
-        <p:txBody>
-          <a:bodyPr rtlCol="0" anchor="ctr"/>
-          <a:lstStyle/>
-          <a:p>
-            <a:pPr algn="ctr"/>
-          </a:p>
-        </p:txBody>
-      </p:sp>
-      <p:sp>
-        <p:nvSpPr>
-          <p:cNvPr id="13" name="TextBox 12"/>
-          <p:cNvSpPr txBox="1"/>
-          <p:nvPr/>
-        </p:nvSpPr>
-        <p:spPr>
-          <a:xfrm>
-            <a:off x="859536" y="4208487"/>
-            <a:ext cx="4957572" cy="245668"/>
-          </a:xfrm>
-          <a:prstGeom prst="rect">
-            <a:avLst/>
-          </a:prstGeom>
-          <a:noFill/>
-        </p:spPr>
-        <p:txBody>
-          <a:bodyPr wrap="square" lIns="0" rIns="0" tIns="0" bIns="0" anchor="t">
-            <a:noAutofit/>
-          </a:bodyPr>
-          <a:lstStyle/>
-          <a:p>
-            <a:pPr algn="l">
-              <a:lnSpc>
-                <a:spcPct val="120000"/>
-              </a:lnSpc>
-              <a:spcAft>
-                <a:spcPts val="400"/>
-              </a:spcAft>
-            </a:pPr>
-            <a:r>
-              <a:rPr sz="1600" b="0">
-                <a:solidFill>
-                  <a:srgbClr val="333333"/>
-                </a:solidFill>
-                <a:latin typeface="Inter"/>
-              </a:rPr>
-              <a:t>Primary extraction-risk struct for a PNT split.</a:t>
+              <a:t>[SHARED-STRUCT]</a:t>
             </a:r>
           </a:p>
         </p:txBody>
@@ -2874,16 +2857,16 @@
         </p:nvSpPr>
         <p:spPr>
           <a:xfrm>
-            <a:off x="6228588" y="3417379"/>
-            <a:ext cx="5396484" cy="1183080"/>
+            <a:off x="2439697" y="4781510"/>
+            <a:ext cx="1701355" cy="274320"/>
           </a:xfrm>
           <a:prstGeom prst="roundRect">
             <a:avLst>
-              <a:gd name="adj" fmla="val 6000"/>
+              <a:gd name="adj" fmla="val 28000"/>
             </a:avLst>
           </a:prstGeom>
           <a:solidFill>
-            <a:srgbClr val="F2F0FE"/>
+            <a:srgbClr val="FFFFFF"/>
           </a:solidFill>
           <a:ln w="9525">
             <a:solidFill>
@@ -2907,6 +2890,65 @@
           </a:fontRef>
         </p:style>
         <p:txBody>
+          <a:bodyPr rtlCol="0" anchor="ctr" wrap="none" lIns="45720" rIns="45720" tIns="0" bIns="0">
+            <a:noAutofit/>
+          </a:bodyPr>
+          <a:lstStyle/>
+          <a:p>
+            <a:pPr algn="ctr">
+              <a:lnSpc>
+                <a:spcPct val="100000"/>
+              </a:lnSpc>
+            </a:pPr>
+            <a:r>
+              <a:rPr sz="1200" b="0">
+                <a:solidFill>
+                  <a:srgbClr val="5B39F3"/>
+                </a:solidFill>
+                <a:latin typeface="Fira Code"/>
+              </a:rPr>
+              <a:t>[MULTI-CATEGORY]</a:t>
+            </a:r>
+          </a:p>
+        </p:txBody>
+      </p:sp>
+      <p:sp>
+        <p:nvSpPr>
+          <p:cNvPr id="15" name="Rectangle 14"/>
+          <p:cNvSpPr/>
+          <p:nvPr/>
+        </p:nvSpPr>
+        <p:spPr>
+          <a:xfrm>
+            <a:off x="713232" y="5147270"/>
+            <a:ext cx="32004" cy="245668"/>
+          </a:xfrm>
+          <a:prstGeom prst="rect">
+            <a:avLst/>
+          </a:prstGeom>
+          <a:solidFill>
+            <a:srgbClr val="5B39F3"/>
+          </a:solidFill>
+          <a:ln>
+            <a:noFill/>
+          </a:ln>
+          <a:effectLst/>
+        </p:spPr>
+        <p:style>
+          <a:lnRef idx="1">
+            <a:schemeClr val="accent1"/>
+          </a:lnRef>
+          <a:fillRef idx="3">
+            <a:schemeClr val="accent1"/>
+          </a:fillRef>
+          <a:effectRef idx="0">
+            <a:schemeClr val="accent1"/>
+          </a:effectRef>
+          <a:fontRef idx="minor">
+            <a:schemeClr val="lt1"/>
+          </a:fontRef>
+        </p:style>
+        <p:txBody>
           <a:bodyPr rtlCol="0" anchor="ctr"/>
           <a:lstStyle/>
           <a:p>
@@ -2916,14 +2958,14 @@
       </p:sp>
       <p:sp>
         <p:nvSpPr>
-          <p:cNvPr id="15" name="TextBox 14"/>
-          <p:cNvSpPr txBox="1"/>
-          <p:nvPr/>
-        </p:nvSpPr>
-        <p:spPr>
-          <a:xfrm>
-            <a:off x="6374892" y="3563683"/>
-            <a:ext cx="5103876" cy="187604"/>
+          <p:cNvPr id="16" name="TextBox 15"/>
+          <p:cNvSpPr txBox="1"/>
+          <p:nvPr/>
+        </p:nvSpPr>
+        <p:spPr>
+          <a:xfrm>
+            <a:off x="859536" y="5147270"/>
+            <a:ext cx="4957572" cy="245668"/>
           </a:xfrm>
           <a:prstGeom prst="rect">
             <a:avLst/>
@@ -2938,42 +2980,42 @@
           <a:p>
             <a:pPr algn="l">
               <a:lnSpc>
-                <a:spcPct val="100000"/>
-              </a:lnSpc>
-              <a:spcAft>
-                <a:spcPts val="0"/>
-              </a:spcAft>
-            </a:pPr>
-            <a:r>
-              <a:rPr sz="1200" b="0">
-                <a:solidFill>
-                  <a:srgbClr val="999999"/>
-                </a:solidFill>
-                <a:latin typeface="Fira Code"/>
-              </a:rPr>
-              <a:t>THE UBIQUITOUS LOCATION VALUE TYPE</a:t>
-            </a:r>
-          </a:p>
-        </p:txBody>
-      </p:sp>
-      <p:sp>
-        <p:nvSpPr>
-          <p:cNvPr id="16" name="Rounded Rectangle 15"/>
+                <a:spcPct val="120000"/>
+              </a:lnSpc>
+              <a:spcAft>
+                <a:spcPts val="400"/>
+              </a:spcAft>
+            </a:pPr>
+            <a:r>
+              <a:rPr sz="1600" b="0">
+                <a:solidFill>
+                  <a:srgbClr val="333333"/>
+                </a:solidFill>
+                <a:latin typeface="Inter"/>
+              </a:rPr>
+              <a:t>“Primary extraction-risk struct for a PNT split.”</a:t>
+            </a:r>
+          </a:p>
+        </p:txBody>
+      </p:sp>
+      <p:sp>
+        <p:nvSpPr>
+          <p:cNvPr id="17" name="Rounded Rectangle 16"/>
           <p:cNvSpPr/>
           <p:nvPr/>
         </p:nvSpPr>
         <p:spPr>
           <a:xfrm>
-            <a:off x="6374892" y="3842727"/>
-            <a:ext cx="1607593" cy="274320"/>
+            <a:off x="6228588" y="4356162"/>
+            <a:ext cx="5396484" cy="1183080"/>
           </a:xfrm>
           <a:prstGeom prst="roundRect">
             <a:avLst>
-              <a:gd name="adj" fmla="val 28000"/>
+              <a:gd name="adj" fmla="val 6000"/>
             </a:avLst>
           </a:prstGeom>
           <a:solidFill>
-            <a:srgbClr val="FFFFFF"/>
+            <a:srgbClr val="F2F0FE"/>
           </a:solidFill>
           <a:ln w="9525">
             <a:solidFill>
@@ -2997,166 +3039,65 @@
           </a:fontRef>
         </p:style>
         <p:txBody>
-          <a:bodyPr rtlCol="0" anchor="ctr" wrap="none" lIns="45720" rIns="45720" tIns="0" bIns="0">
-            <a:noAutofit/>
-          </a:bodyPr>
-          <a:lstStyle/>
-          <a:p>
-            <a:pPr algn="ctr">
+          <a:bodyPr rtlCol="0" anchor="ctr"/>
+          <a:lstStyle/>
+          <a:p>
+            <a:pPr algn="ctr"/>
+          </a:p>
+        </p:txBody>
+      </p:sp>
+      <p:sp>
+        <p:nvSpPr>
+          <p:cNvPr id="18" name="TextBox 17"/>
+          <p:cNvSpPr txBox="1"/>
+          <p:nvPr/>
+        </p:nvSpPr>
+        <p:spPr>
+          <a:xfrm>
+            <a:off x="6374892" y="4502466"/>
+            <a:ext cx="5103876" cy="187604"/>
+          </a:xfrm>
+          <a:prstGeom prst="rect">
+            <a:avLst/>
+          </a:prstGeom>
+          <a:noFill/>
+        </p:spPr>
+        <p:txBody>
+          <a:bodyPr wrap="square" lIns="0" rIns="0" tIns="0" bIns="0" anchor="t">
+            <a:noAutofit/>
+          </a:bodyPr>
+          <a:lstStyle/>
+          <a:p>
+            <a:pPr algn="l">
               <a:lnSpc>
                 <a:spcPct val="100000"/>
               </a:lnSpc>
+              <a:spcAft>
+                <a:spcPts val="0"/>
+              </a:spcAft>
             </a:pPr>
             <a:r>
               <a:rPr sz="1200" b="0">
                 <a:solidFill>
-                  <a:srgbClr val="5B39F3"/>
+                  <a:srgbClr val="999999"/>
                 </a:solidFill>
                 <a:latin typeface="Fira Code"/>
               </a:rPr>
-              <a:t>[SHARED-STRUCT]</a:t>
-            </a:r>
-          </a:p>
-        </p:txBody>
-      </p:sp>
-      <p:sp>
-        <p:nvSpPr>
-          <p:cNvPr id="17" name="Rectangle 16"/>
+              <a:t>THE UBIQUITOUS LOCATION VALUE TYPE</a:t>
+            </a:r>
+          </a:p>
+        </p:txBody>
+      </p:sp>
+      <p:sp>
+        <p:nvSpPr>
+          <p:cNvPr id="19" name="Rounded Rectangle 18"/>
           <p:cNvSpPr/>
           <p:nvPr/>
         </p:nvSpPr>
         <p:spPr>
           <a:xfrm>
-            <a:off x="6374892" y="4208487"/>
-            <a:ext cx="32004" cy="245668"/>
-          </a:xfrm>
-          <a:prstGeom prst="rect">
-            <a:avLst/>
-          </a:prstGeom>
-          <a:solidFill>
-            <a:srgbClr val="5B39F3"/>
-          </a:solidFill>
-          <a:ln>
-            <a:noFill/>
-          </a:ln>
-          <a:effectLst/>
-        </p:spPr>
-        <p:style>
-          <a:lnRef idx="1">
-            <a:schemeClr val="accent1"/>
-          </a:lnRef>
-          <a:fillRef idx="3">
-            <a:schemeClr val="accent1"/>
-          </a:fillRef>
-          <a:effectRef idx="0">
-            <a:schemeClr val="accent1"/>
-          </a:effectRef>
-          <a:fontRef idx="minor">
-            <a:schemeClr val="lt1"/>
-          </a:fontRef>
-        </p:style>
-        <p:txBody>
-          <a:bodyPr rtlCol="0" anchor="ctr"/>
-          <a:lstStyle/>
-          <a:p>
-            <a:pPr algn="ctr"/>
-          </a:p>
-        </p:txBody>
-      </p:sp>
-      <p:sp>
-        <p:nvSpPr>
-          <p:cNvPr id="18" name="TextBox 17"/>
-          <p:cNvSpPr txBox="1"/>
-          <p:nvPr/>
-        </p:nvSpPr>
-        <p:spPr>
-          <a:xfrm>
-            <a:off x="6521196" y="4208487"/>
-            <a:ext cx="4957572" cy="245668"/>
-          </a:xfrm>
-          <a:prstGeom prst="rect">
-            <a:avLst/>
-          </a:prstGeom>
-          <a:noFill/>
-        </p:spPr>
-        <p:txBody>
-          <a:bodyPr wrap="square" lIns="0" rIns="0" tIns="0" bIns="0" anchor="t">
-            <a:noAutofit/>
-          </a:bodyPr>
-          <a:lstStyle/>
-          <a:p>
-            <a:pPr algn="l">
-              <a:lnSpc>
-                <a:spcPct val="120000"/>
-              </a:lnSpc>
-              <a:spcAft>
-                <a:spcPts val="400"/>
-              </a:spcAft>
-            </a:pPr>
-            <a:r>
-              <a:rPr sz="1600" b="0">
-                <a:solidFill>
-                  <a:srgbClr val="333333"/>
-                </a:solidFill>
-                <a:latin typeface="Inter"/>
-              </a:rPr>
-              <a:t>Ubiquitous value type; top extraction risk.</a:t>
-            </a:r>
-          </a:p>
-        </p:txBody>
-      </p:sp>
-      <p:sp>
-        <p:nvSpPr>
-          <p:cNvPr id="19" name="TextBox 18"/>
-          <p:cNvSpPr txBox="1"/>
-          <p:nvPr/>
-        </p:nvSpPr>
-        <p:spPr>
-          <a:xfrm>
-            <a:off x="566928" y="4746763"/>
-            <a:ext cx="11058144" cy="225704"/>
-          </a:xfrm>
-          <a:prstGeom prst="rect">
-            <a:avLst/>
-          </a:prstGeom>
-          <a:noFill/>
-        </p:spPr>
-        <p:txBody>
-          <a:bodyPr wrap="square" lIns="0" rIns="0" tIns="0" bIns="0" anchor="t">
-            <a:noAutofit/>
-          </a:bodyPr>
-          <a:lstStyle/>
-          <a:p>
-            <a:pPr algn="l">
-              <a:lnSpc>
-                <a:spcPct val="100000"/>
-              </a:lnSpc>
-              <a:spcAft>
-                <a:spcPts val="300"/>
-              </a:spcAft>
-            </a:pPr>
-            <a:r>
-              <a:rPr sz="1200" b="0">
-                <a:solidFill>
-                  <a:srgbClr val="999999"/>
-                </a:solidFill>
-                <a:latin typeface="Fira Code"/>
-              </a:rPr>
-              <a:t>CATALOG-WIDE FLAG COUNTS</a:t>
-            </a:r>
-          </a:p>
-        </p:txBody>
-      </p:sp>
-      <p:sp>
-        <p:nvSpPr>
-          <p:cNvPr id="20" name="Rounded Rectangle 19"/>
-          <p:cNvSpPr/>
-          <p:nvPr/>
-        </p:nvSpPr>
-        <p:spPr>
-          <a:xfrm>
-            <a:off x="566928" y="4972467"/>
-            <a:ext cx="1982640" cy="274320"/>
+            <a:off x="6374892" y="4781510"/>
+            <a:ext cx="1607593" cy="274320"/>
           </a:xfrm>
           <a:prstGeom prst="roundRect">
             <a:avLst>
@@ -3164,7 +3105,7 @@
             </a:avLst>
           </a:prstGeom>
           <a:solidFill>
-            <a:srgbClr val="F4EFF6"/>
+            <a:srgbClr val="FFFFFF"/>
           </a:solidFill>
           <a:ln w="9525">
             <a:solidFill>
@@ -3205,20 +3146,148 @@
                 </a:solidFill>
                 <a:latin typeface="Fira Code"/>
               </a:rPr>
-              <a:t>[SHARED-STRUCT]  19</a:t>
-            </a:r>
-          </a:p>
-        </p:txBody>
-      </p:sp>
-      <p:sp>
-        <p:nvSpPr>
-          <p:cNvPr id="21" name="Rounded Rectangle 20"/>
+              <a:t>[SHARED-STRUCT]</a:t>
+            </a:r>
+          </a:p>
+        </p:txBody>
+      </p:sp>
+      <p:sp>
+        <p:nvSpPr>
+          <p:cNvPr id="20" name="Rectangle 19"/>
           <p:cNvSpPr/>
           <p:nvPr/>
         </p:nvSpPr>
         <p:spPr>
           <a:xfrm>
-            <a:off x="2668440" y="4972467"/>
+            <a:off x="6374892" y="5147270"/>
+            <a:ext cx="32004" cy="245668"/>
+          </a:xfrm>
+          <a:prstGeom prst="rect">
+            <a:avLst/>
+          </a:prstGeom>
+          <a:solidFill>
+            <a:srgbClr val="5B39F3"/>
+          </a:solidFill>
+          <a:ln>
+            <a:noFill/>
+          </a:ln>
+          <a:effectLst/>
+        </p:spPr>
+        <p:style>
+          <a:lnRef idx="1">
+            <a:schemeClr val="accent1"/>
+          </a:lnRef>
+          <a:fillRef idx="3">
+            <a:schemeClr val="accent1"/>
+          </a:fillRef>
+          <a:effectRef idx="0">
+            <a:schemeClr val="accent1"/>
+          </a:effectRef>
+          <a:fontRef idx="minor">
+            <a:schemeClr val="lt1"/>
+          </a:fontRef>
+        </p:style>
+        <p:txBody>
+          <a:bodyPr rtlCol="0" anchor="ctr"/>
+          <a:lstStyle/>
+          <a:p>
+            <a:pPr algn="ctr"/>
+          </a:p>
+        </p:txBody>
+      </p:sp>
+      <p:sp>
+        <p:nvSpPr>
+          <p:cNvPr id="21" name="TextBox 20"/>
+          <p:cNvSpPr txBox="1"/>
+          <p:nvPr/>
+        </p:nvSpPr>
+        <p:spPr>
+          <a:xfrm>
+            <a:off x="6521196" y="5147270"/>
+            <a:ext cx="4957572" cy="245668"/>
+          </a:xfrm>
+          <a:prstGeom prst="rect">
+            <a:avLst/>
+          </a:prstGeom>
+          <a:noFill/>
+        </p:spPr>
+        <p:txBody>
+          <a:bodyPr wrap="square" lIns="0" rIns="0" tIns="0" bIns="0" anchor="t">
+            <a:noAutofit/>
+          </a:bodyPr>
+          <a:lstStyle/>
+          <a:p>
+            <a:pPr algn="l">
+              <a:lnSpc>
+                <a:spcPct val="120000"/>
+              </a:lnSpc>
+              <a:spcAft>
+                <a:spcPts val="400"/>
+              </a:spcAft>
+            </a:pPr>
+            <a:r>
+              <a:rPr sz="1600" b="0">
+                <a:solidFill>
+                  <a:srgbClr val="333333"/>
+                </a:solidFill>
+                <a:latin typeface="Inter"/>
+              </a:rPr>
+              <a:t>“Ubiquitous value type; top extraction risk.”</a:t>
+            </a:r>
+          </a:p>
+        </p:txBody>
+      </p:sp>
+      <p:sp>
+        <p:nvSpPr>
+          <p:cNvPr id="22" name="TextBox 21"/>
+          <p:cNvSpPr txBox="1"/>
+          <p:nvPr/>
+        </p:nvSpPr>
+        <p:spPr>
+          <a:xfrm>
+            <a:off x="566928" y="5685546"/>
+            <a:ext cx="11058144" cy="225704"/>
+          </a:xfrm>
+          <a:prstGeom prst="rect">
+            <a:avLst/>
+          </a:prstGeom>
+          <a:noFill/>
+        </p:spPr>
+        <p:txBody>
+          <a:bodyPr wrap="square" lIns="0" rIns="0" tIns="0" bIns="0" anchor="t">
+            <a:noAutofit/>
+          </a:bodyPr>
+          <a:lstStyle/>
+          <a:p>
+            <a:pPr algn="l">
+              <a:lnSpc>
+                <a:spcPct val="100000"/>
+              </a:lnSpc>
+              <a:spcAft>
+                <a:spcPts val="300"/>
+              </a:spcAft>
+            </a:pPr>
+            <a:r>
+              <a:rPr sz="1200" b="0">
+                <a:solidFill>
+                  <a:srgbClr val="999999"/>
+                </a:solidFill>
+                <a:latin typeface="Fira Code"/>
+              </a:rPr>
+              <a:t>CATALOG-WIDE FLAG COUNTS</a:t>
+            </a:r>
+          </a:p>
+        </p:txBody>
+      </p:sp>
+      <p:sp>
+        <p:nvSpPr>
+          <p:cNvPr id="23" name="Rounded Rectangle 22"/>
+          <p:cNvSpPr/>
+          <p:nvPr/>
+        </p:nvSpPr>
+        <p:spPr>
+          <a:xfrm>
+            <a:off x="566928" y="5911250"/>
             <a:ext cx="1982640" cy="274320"/>
           </a:xfrm>
           <a:prstGeom prst="roundRect">
@@ -3268,6 +3337,69 @@
                 </a:solidFill>
                 <a:latin typeface="Fira Code"/>
               </a:rPr>
+              <a:t>[SHARED-STRUCT]  19</a:t>
+            </a:r>
+          </a:p>
+        </p:txBody>
+      </p:sp>
+      <p:sp>
+        <p:nvSpPr>
+          <p:cNvPr id="24" name="Rounded Rectangle 23"/>
+          <p:cNvSpPr/>
+          <p:nvPr/>
+        </p:nvSpPr>
+        <p:spPr>
+          <a:xfrm>
+            <a:off x="2668440" y="5911250"/>
+            <a:ext cx="1982640" cy="274320"/>
+          </a:xfrm>
+          <a:prstGeom prst="roundRect">
+            <a:avLst>
+              <a:gd name="adj" fmla="val 28000"/>
+            </a:avLst>
+          </a:prstGeom>
+          <a:solidFill>
+            <a:srgbClr val="F4EFF6"/>
+          </a:solidFill>
+          <a:ln w="9525">
+            <a:solidFill>
+              <a:srgbClr val="E1DBFD"/>
+            </a:solidFill>
+          </a:ln>
+          <a:effectLst/>
+        </p:spPr>
+        <p:style>
+          <a:lnRef idx="1">
+            <a:schemeClr val="accent1"/>
+          </a:lnRef>
+          <a:fillRef idx="3">
+            <a:schemeClr val="accent1"/>
+          </a:fillRef>
+          <a:effectRef idx="0">
+            <a:schemeClr val="accent1"/>
+          </a:effectRef>
+          <a:fontRef idx="minor">
+            <a:schemeClr val="lt1"/>
+          </a:fontRef>
+        </p:style>
+        <p:txBody>
+          <a:bodyPr rtlCol="0" anchor="ctr" wrap="none" lIns="45720" rIns="45720" tIns="0" bIns="0">
+            <a:noAutofit/>
+          </a:bodyPr>
+          <a:lstStyle/>
+          <a:p>
+            <a:pPr algn="ctr">
+              <a:lnSpc>
+                <a:spcPct val="100000"/>
+              </a:lnSpc>
+            </a:pPr>
+            <a:r>
+              <a:rPr sz="1200" b="0">
+                <a:solidFill>
+                  <a:srgbClr val="5B39F3"/>
+                </a:solidFill>
+                <a:latin typeface="Fira Code"/>
+              </a:rPr>
               <a:t>[MULTI-CATEGORY]  7</a:t>
             </a:r>
           </a:p>
@@ -3275,7 +3407,7 @@
       </p:sp>
       <p:sp>
         <p:nvSpPr>
-          <p:cNvPr id="22" name="TextBox 21"/>
+          <p:cNvPr id="25" name="TextBox 24"/>
           <p:cNvSpPr txBox="1"/>
           <p:nvPr/>
         </p:nvSpPr>
@@ -3860,7 +3992,7 @@
                 </a:solidFill>
                 <a:latin typeface="Inter"/>
               </a:rPr>
-              <a:t>AHRS↔EKF mutual reference.</a:t>
+              <a:t>“AHRS↔EKF mutual reference.”</a:t>
             </a:r>
           </a:p>
         </p:txBody>
@@ -4532,7 +4664,7 @@
                 </a:solidFill>
                 <a:latin typeface="Inter"/>
               </a:rPr>
-              <a:t>the time primitive every PNT subsystem stamps against</a:t>
+              <a:t>“the time primitive every PNT subsystem stamps against”</a:t>
             </a:r>
           </a:p>
         </p:txBody>
@@ -4708,7 +4840,7 @@
                 </a:solidFill>
                 <a:latin typeface="Inter"/>
               </a:rPr>
-              <a:t>Drives the cadence of every periodic PNT task</a:t>
+              <a:t>“Drives the cadence of every periodic PNT task”</a:t>
             </a:r>
           </a:p>
         </p:txBody>
@@ -5917,7 +6049,7 @@
         </p:nvSpPr>
         <p:spPr>
           <a:xfrm>
-            <a:off x="566928" y="3000717"/>
+            <a:off x="566928" y="3064725"/>
             <a:ext cx="5396484" cy="1183080"/>
           </a:xfrm>
           <a:prstGeom prst="roundRect">
@@ -5965,7 +6097,7 @@
         </p:nvSpPr>
         <p:spPr>
           <a:xfrm>
-            <a:off x="713232" y="3147021"/>
+            <a:off x="713232" y="3211029"/>
             <a:ext cx="5103876" cy="187604"/>
           </a:xfrm>
           <a:prstGeom prst="rect">
@@ -6007,7 +6139,7 @@
         </p:nvSpPr>
         <p:spPr>
           <a:xfrm>
-            <a:off x="713232" y="3426065"/>
+            <a:off x="713232" y="3490073"/>
             <a:ext cx="1326308" cy="274320"/>
           </a:xfrm>
           <a:prstGeom prst="roundRect">
@@ -6070,7 +6202,7 @@
         </p:nvSpPr>
         <p:spPr>
           <a:xfrm>
-            <a:off x="713232" y="3791825"/>
+            <a:off x="713232" y="3855833"/>
             <a:ext cx="32004" cy="245668"/>
           </a:xfrm>
           <a:prstGeom prst="rect">
@@ -6114,7 +6246,7 @@
         </p:nvSpPr>
         <p:spPr>
           <a:xfrm>
-            <a:off x="859536" y="3791825"/>
+            <a:off x="859536" y="3855833"/>
             <a:ext cx="4957572" cy="245668"/>
           </a:xfrm>
           <a:prstGeom prst="rect">
@@ -6143,7 +6275,7 @@
                 </a:solidFill>
                 <a:latin typeface="Inter"/>
               </a:rPr>
-              <a:t>a 4-way copy-paste (extraction risk)</a:t>
+              <a:t>“a 4-way copy-paste (extraction risk)”</a:t>
             </a:r>
           </a:p>
         </p:txBody>
@@ -6156,7 +6288,7 @@
         </p:nvSpPr>
         <p:spPr>
           <a:xfrm>
-            <a:off x="6228588" y="3000717"/>
+            <a:off x="6228588" y="3064725"/>
             <a:ext cx="5396484" cy="1183080"/>
           </a:xfrm>
           <a:prstGeom prst="roundRect">
@@ -6204,7 +6336,7 @@
         </p:nvSpPr>
         <p:spPr>
           <a:xfrm>
-            <a:off x="6374892" y="3147021"/>
+            <a:off x="6374892" y="3211029"/>
             <a:ext cx="5103876" cy="187604"/>
           </a:xfrm>
           <a:prstGeom prst="rect">
@@ -6246,7 +6378,7 @@
         </p:nvSpPr>
         <p:spPr>
           <a:xfrm>
-            <a:off x="6374892" y="3426065"/>
+            <a:off x="6374892" y="3490073"/>
             <a:ext cx="1326308" cy="274320"/>
           </a:xfrm>
           <a:prstGeom prst="roundRect">
@@ -6309,7 +6441,7 @@
         </p:nvSpPr>
         <p:spPr>
           <a:xfrm>
-            <a:off x="6374892" y="3791825"/>
+            <a:off x="6374892" y="3855833"/>
             <a:ext cx="32004" cy="245668"/>
           </a:xfrm>
           <a:prstGeom prst="rect">
@@ -6353,7 +6485,7 @@
         </p:nvSpPr>
         <p:spPr>
           <a:xfrm>
-            <a:off x="6521196" y="3791825"/>
+            <a:off x="6521196" y="3855833"/>
             <a:ext cx="4957572" cy="245668"/>
           </a:xfrm>
           <a:prstGeom prst="rect">
@@ -6382,7 +6514,7 @@
                 </a:solidFill>
                 <a:latin typeface="Inter"/>
               </a:rPr>
-              <a:t>replicated 5 ways</a:t>
+              <a:t>“replicated 5 ways”</a:t>
             </a:r>
           </a:p>
         </p:txBody>
@@ -6395,7 +6527,7 @@
         </p:nvSpPr>
         <p:spPr>
           <a:xfrm>
-            <a:off x="566928" y="4330101"/>
+            <a:off x="566928" y="4394109"/>
             <a:ext cx="11058144" cy="225704"/>
           </a:xfrm>
           <a:prstGeom prst="rect">
@@ -6437,7 +6569,7 @@
         </p:nvSpPr>
         <p:spPr>
           <a:xfrm>
-            <a:off x="566928" y="4555805"/>
+            <a:off x="566928" y="4619813"/>
             <a:ext cx="1701355" cy="274320"/>
           </a:xfrm>
           <a:prstGeom prst="roundRect">
@@ -6717,7 +6849,7 @@
                 </a:solidFill>
                 <a:latin typeface="Inter"/>
               </a:rPr>
-              <a:t>The copies are not identical — the audit records divergence across vehicles.</a:t>
+              <a:t>The copies are not identical.</a:t>
             </a:r>
           </a:p>
         </p:txBody>
@@ -6731,7 +6863,7 @@
         <p:spPr>
           <a:xfrm>
             <a:off x="566928" y="1852079"/>
-            <a:ext cx="11058144" cy="1609953"/>
+            <a:ext cx="11058144" cy="1193292"/>
           </a:xfrm>
           <a:prstGeom prst="rect">
             <a:avLst/>
@@ -6765,7 +6897,7 @@
                 </a:solidFill>
                 <a:latin typeface="Inter"/>
               </a:rPr>
-              <a:t>Thresholds and actions diverge across vehicles; some share an outcome.</a:t>
+              <a:t>Four dimensions diverge: threshold, action, hysteresis, rate gate.</a:t>
             </a:r>
           </a:p>
           <a:p>
@@ -6790,7 +6922,7 @@
                 </a:solidFill>
                 <a:latin typeface="Inter"/>
               </a:rPr>
-              <a:t>Hysteresis and check cadence diverge too.</a:t>
+              <a:t>Group 2 chains run 2 to 5 hops; the deepest core chain, 8.</a:t>
             </a:r>
           </a:p>
           <a:p>
@@ -6815,32 +6947,7 @@
                 </a:solidFill>
                 <a:latin typeface="Inter"/>
               </a:rPr>
-              <a:t>Group 2 chains run 2 to 5 hops; the deepest core chain, 8.</a:t>
-            </a:r>
-          </a:p>
-          <a:p>
-            <a:pPr algn="l" marL="228600" indent="-228600">
-              <a:lnSpc>
-                <a:spcPct val="124000"/>
-              </a:lnSpc>
-              <a:spcAft>
-                <a:spcPts val="900"/>
-              </a:spcAft>
-              <a:buClr>
-                <a:srgbClr val="333333"/>
-              </a:buClr>
-              <a:buSzPct val="100000"/>
-              <a:buFont typeface="Inter"/>
-              <a:buChar char="•"/>
-            </a:pPr>
-            <a:r>
-              <a:rPr sz="1600" b="0">
-                <a:solidFill>
-                  <a:srgbClr val="333333"/>
-                </a:solidFill>
-                <a:latin typeface="Inter"/>
-              </a:rPr>
-              <a:t>Chains end in real action: a mode refused, a failsafe landing.</a:t>
+              <a:t>Chains end in a mode refused or a failsafe landing.</a:t>
             </a:r>
           </a:p>
         </p:txBody>
@@ -6853,8 +6960,8 @@
         </p:nvSpPr>
         <p:spPr>
           <a:xfrm>
-            <a:off x="566928" y="3608336"/>
-            <a:ext cx="11058144" cy="1183080"/>
+            <a:off x="566928" y="3191675"/>
+            <a:ext cx="5396484" cy="1196186"/>
           </a:xfrm>
           <a:prstGeom prst="roundRect">
             <a:avLst>
@@ -6901,8 +7008,8 @@
         </p:nvSpPr>
         <p:spPr>
           <a:xfrm>
-            <a:off x="713232" y="3754640"/>
-            <a:ext cx="10765536" cy="187604"/>
+            <a:off x="713232" y="3337979"/>
+            <a:ext cx="5103876" cy="187604"/>
           </a:xfrm>
           <a:prstGeom prst="rect">
             <a:avLst/>
@@ -6917,7 +7024,7 @@
           <a:p>
             <a:pPr algn="l">
               <a:lnSpc>
-                <a:spcPct val="100000"/>
+                <a:spcPct val="120000"/>
               </a:lnSpc>
               <a:spcAft>
                 <a:spcPts val="0"/>
@@ -6926,33 +7033,117 @@
             <a:r>
               <a:rPr sz="1200" b="0">
                 <a:solidFill>
+                  <a:srgbClr val="5B39F3"/>
+                </a:solidFill>
+                <a:latin typeface="Fira Code"/>
+              </a:rPr>
+              <a:t>SAME WATCHDOG, TWO TRIP WINDOWS</a:t>
+            </a:r>
+          </a:p>
+        </p:txBody>
+      </p:sp>
+      <p:sp>
+        <p:nvSpPr>
+          <p:cNvPr id="9" name="TextBox 8"/>
+          <p:cNvSpPr txBox="1"/>
+          <p:nvPr/>
+        </p:nvSpPr>
+        <p:spPr>
+          <a:xfrm>
+            <a:off x="713232" y="3589591"/>
+            <a:ext cx="5103876" cy="403707"/>
+          </a:xfrm>
+          <a:prstGeom prst="rect">
+            <a:avLst/>
+          </a:prstGeom>
+          <a:noFill/>
+        </p:spPr>
+        <p:txBody>
+          <a:bodyPr wrap="square" lIns="0" rIns="0" tIns="0" bIns="0" anchor="t">
+            <a:noAutofit/>
+          </a:bodyPr>
+          <a:lstStyle/>
+          <a:p>
+            <a:pPr algn="l">
+              <a:lnSpc>
+                <a:spcPct val="120000"/>
+              </a:lnSpc>
+              <a:spcAft>
+                <a:spcPts val="0"/>
+              </a:spcAft>
+            </a:pPr>
+            <a:r>
+              <a:rPr sz="1200" b="0">
+                <a:solidFill>
+                  <a:srgbClr val="333333"/>
+                </a:solidFill>
+                <a:latin typeface="Inter"/>
+              </a:rPr>
+              <a:t>2 s → motor minimum: Copter (which also disarms), Sub, Blimp. 0.2 s → Plane RC-passthrough; Rover disarm (CPUFAILSAFE).</a:t>
+            </a:r>
+          </a:p>
+        </p:txBody>
+      </p:sp>
+      <p:sp>
+        <p:nvSpPr>
+          <p:cNvPr id="10" name="TextBox 9"/>
+          <p:cNvSpPr txBox="1"/>
+          <p:nvPr/>
+        </p:nvSpPr>
+        <p:spPr>
+          <a:xfrm>
+            <a:off x="713232" y="4057306"/>
+            <a:ext cx="5103876" cy="184251"/>
+          </a:xfrm>
+          <a:prstGeom prst="rect">
+            <a:avLst/>
+          </a:prstGeom>
+          <a:noFill/>
+        </p:spPr>
+        <p:txBody>
+          <a:bodyPr wrap="square" lIns="0" rIns="0" tIns="0" bIns="0" anchor="t">
+            <a:noAutofit/>
+          </a:bodyPr>
+          <a:lstStyle/>
+          <a:p>
+            <a:pPr algn="l">
+              <a:lnSpc>
+                <a:spcPct val="120000"/>
+              </a:lnSpc>
+              <a:spcAft>
+                <a:spcPts val="0"/>
+              </a:spcAft>
+            </a:pPr>
+            <a:r>
+              <a:rPr sz="1200" b="0">
+                <a:solidFill>
                   <a:srgbClr val="999999"/>
                 </a:solidFill>
-                <a:latin typeface="Fira Code"/>
-              </a:rPr>
-              <a:t>THE DIVERGENCE, IN THE AUDIT’S OWN WORDS</a:t>
-            </a:r>
-          </a:p>
-        </p:txBody>
-      </p:sp>
-      <p:sp>
-        <p:nvSpPr>
-          <p:cNvPr id="9" name="Rounded Rectangle 8"/>
+                <a:latin typeface="Inter"/>
+              </a:rPr>
+              <a:t>“Divergent: 0.2 s trip + RC-passthrough (vs Copter 2 s + disarm).”</a:t>
+            </a:r>
+          </a:p>
+        </p:txBody>
+      </p:sp>
+      <p:sp>
+        <p:nvSpPr>
+          <p:cNvPr id="11" name="Rounded Rectangle 10"/>
           <p:cNvSpPr/>
           <p:nvPr/>
         </p:nvSpPr>
         <p:spPr>
           <a:xfrm>
-            <a:off x="713232" y="4033684"/>
-            <a:ext cx="1326308" cy="274320"/>
+            <a:off x="6228588" y="3191675"/>
+            <a:ext cx="5396484" cy="1196186"/>
           </a:xfrm>
           <a:prstGeom prst="roundRect">
             <a:avLst>
-              <a:gd name="adj" fmla="val 28000"/>
+              <a:gd name="adj" fmla="val 6000"/>
             </a:avLst>
           </a:prstGeom>
           <a:solidFill>
-            <a:srgbClr val="FFFFFF"/>
+            <a:srgbClr val="F2F0FE"/>
           </a:solidFill>
           <a:ln w="9525">
             <a:solidFill>
@@ -6976,47 +7167,204 @@
           </a:fontRef>
         </p:style>
         <p:txBody>
-          <a:bodyPr rtlCol="0" anchor="ctr" wrap="none" lIns="45720" rIns="45720" tIns="0" bIns="0">
-            <a:noAutofit/>
-          </a:bodyPr>
-          <a:lstStyle/>
-          <a:p>
-            <a:pPr algn="ctr">
+          <a:bodyPr rtlCol="0" anchor="ctr"/>
+          <a:lstStyle/>
+          <a:p>
+            <a:pPr algn="ctr"/>
+          </a:p>
+        </p:txBody>
+      </p:sp>
+      <p:sp>
+        <p:nvSpPr>
+          <p:cNvPr id="12" name="TextBox 11"/>
+          <p:cNvSpPr txBox="1"/>
+          <p:nvPr/>
+        </p:nvSpPr>
+        <p:spPr>
+          <a:xfrm>
+            <a:off x="6374892" y="3337979"/>
+            <a:ext cx="5103876" cy="187604"/>
+          </a:xfrm>
+          <a:prstGeom prst="rect">
+            <a:avLst/>
+          </a:prstGeom>
+          <a:noFill/>
+        </p:spPr>
+        <p:txBody>
+          <a:bodyPr wrap="square" lIns="0" rIns="0" tIns="0" bIns="0" anchor="t">
+            <a:noAutofit/>
+          </a:bodyPr>
+          <a:lstStyle/>
+          <a:p>
+            <a:pPr algn="l">
+              <a:lnSpc>
+                <a:spcPct val="120000"/>
+              </a:lnSpc>
+              <a:spcAft>
+                <a:spcPts val="0"/>
+              </a:spcAft>
+            </a:pPr>
+            <a:r>
+              <a:rPr sz="1200" b="0">
+                <a:solidFill>
+                  <a:srgbClr val="5B39F3"/>
+                </a:solidFill>
+                <a:latin typeface="Fira Code"/>
+              </a:rPr>
+              <a:t>ONE FENCE CHECK, TWO RATE GATES</a:t>
+            </a:r>
+          </a:p>
+        </p:txBody>
+      </p:sp>
+      <p:sp>
+        <p:nvSpPr>
+          <p:cNvPr id="13" name="TextBox 12"/>
+          <p:cNvSpPr txBox="1"/>
+          <p:nvPr/>
+        </p:nvSpPr>
+        <p:spPr>
+          <a:xfrm>
+            <a:off x="6374892" y="3589591"/>
+            <a:ext cx="5103876" cy="184251"/>
+          </a:xfrm>
+          <a:prstGeom prst="rect">
+            <a:avLst/>
+          </a:prstGeom>
+          <a:noFill/>
+        </p:spPr>
+        <p:txBody>
+          <a:bodyPr wrap="square" lIns="0" rIns="0" tIns="0" bIns="0" anchor="t">
+            <a:noAutofit/>
+          </a:bodyPr>
+          <a:lstStyle/>
+          <a:p>
+            <a:pPr algn="l">
+              <a:lnSpc>
+                <a:spcPct val="120000"/>
+              </a:lnSpc>
+              <a:spcAft>
+                <a:spcPts val="0"/>
+              </a:spcAft>
+            </a:pPr>
+            <a:r>
+              <a:rPr sz="1200" b="0">
+                <a:solidFill>
+                  <a:srgbClr val="333333"/>
+                </a:solidFill>
+                <a:latin typeface="Inter"/>
+              </a:rPr>
+              <a:t>Copter first, then Rover:</a:t>
+            </a:r>
+          </a:p>
+        </p:txBody>
+      </p:sp>
+      <p:sp>
+        <p:nvSpPr>
+          <p:cNvPr id="14" name="TextBox 13"/>
+          <p:cNvSpPr txBox="1"/>
+          <p:nvPr/>
+        </p:nvSpPr>
+        <p:spPr>
+          <a:xfrm>
+            <a:off x="6374892" y="3837850"/>
+            <a:ext cx="5103876" cy="184251"/>
+          </a:xfrm>
+          <a:prstGeom prst="rect">
+            <a:avLst/>
+          </a:prstGeom>
+          <a:noFill/>
+        </p:spPr>
+        <p:txBody>
+          <a:bodyPr wrap="square" lIns="0" rIns="0" tIns="0" bIns="0" anchor="t">
+            <a:noAutofit/>
+          </a:bodyPr>
+          <a:lstStyle/>
+          <a:p>
+            <a:pPr algn="l">
+              <a:lnSpc>
+                <a:spcPct val="120000"/>
+              </a:lnSpc>
+              <a:spcAft>
+                <a:spcPts val="0"/>
+              </a:spcAft>
+            </a:pPr>
+            <a:r>
+              <a:rPr sz="1200" b="0">
+                <a:solidFill>
+                  <a:srgbClr val="999999"/>
+                </a:solidFill>
+                <a:latin typeface="Inter"/>
+              </a:rPr>
+              <a:t>“divergent rate (40U/25 Hz vs 100U/10 Hz)”</a:t>
+            </a:r>
+          </a:p>
+        </p:txBody>
+      </p:sp>
+      <p:sp>
+        <p:nvSpPr>
+          <p:cNvPr id="15" name="TextBox 14"/>
+          <p:cNvSpPr txBox="1"/>
+          <p:nvPr/>
+        </p:nvSpPr>
+        <p:spPr>
+          <a:xfrm>
+            <a:off x="566928" y="4534165"/>
+            <a:ext cx="11058144" cy="225704"/>
+          </a:xfrm>
+          <a:prstGeom prst="rect">
+            <a:avLst/>
+          </a:prstGeom>
+          <a:noFill/>
+        </p:spPr>
+        <p:txBody>
+          <a:bodyPr wrap="square" lIns="0" rIns="0" tIns="0" bIns="0" anchor="t">
+            <a:noAutofit/>
+          </a:bodyPr>
+          <a:lstStyle/>
+          <a:p>
+            <a:pPr algn="l">
               <a:lnSpc>
                 <a:spcPct val="100000"/>
               </a:lnSpc>
+              <a:spcAft>
+                <a:spcPts val="300"/>
+              </a:spcAft>
             </a:pPr>
             <a:r>
               <a:rPr sz="1200" b="0">
                 <a:solidFill>
-                  <a:srgbClr val="5B39F3"/>
+                  <a:srgbClr val="999999"/>
                 </a:solidFill>
                 <a:latin typeface="Fira Code"/>
               </a:rPr>
-              <a:t>[DUPLICATED]</a:t>
-            </a:r>
-          </a:p>
-        </p:txBody>
-      </p:sp>
-      <p:sp>
-        <p:nvSpPr>
-          <p:cNvPr id="10" name="Rectangle 9"/>
+              <a:t>CATALOG-WIDE FLAG COUNTS</a:t>
+            </a:r>
+          </a:p>
+        </p:txBody>
+      </p:sp>
+      <p:sp>
+        <p:nvSpPr>
+          <p:cNvPr id="16" name="Rounded Rectangle 15"/>
           <p:cNvSpPr/>
           <p:nvPr/>
         </p:nvSpPr>
         <p:spPr>
           <a:xfrm>
-            <a:off x="713232" y="4399444"/>
-            <a:ext cx="32004" cy="245668"/>
-          </a:xfrm>
-          <a:prstGeom prst="rect">
-            <a:avLst/>
-          </a:prstGeom>
-          <a:solidFill>
-            <a:srgbClr val="5B39F3"/>
-          </a:solidFill>
-          <a:ln>
-            <a:noFill/>
+            <a:off x="566928" y="4759869"/>
+            <a:ext cx="1701355" cy="274320"/>
+          </a:xfrm>
+          <a:prstGeom prst="roundRect">
+            <a:avLst>
+              <a:gd name="adj" fmla="val 28000"/>
+            </a:avLst>
+          </a:prstGeom>
+          <a:solidFill>
+            <a:srgbClr val="F4EFF6"/>
+          </a:solidFill>
+          <a:ln w="9525">
+            <a:solidFill>
+              <a:srgbClr val="E1DBFD"/>
+            </a:solidFill>
           </a:ln>
           <a:effectLst/>
         </p:spPr>
@@ -7035,58 +7383,31 @@
           </a:fontRef>
         </p:style>
         <p:txBody>
-          <a:bodyPr rtlCol="0" anchor="ctr"/>
-          <a:lstStyle/>
-          <a:p>
-            <a:pPr algn="ctr"/>
-          </a:p>
-        </p:txBody>
-      </p:sp>
-      <p:sp>
-        <p:nvSpPr>
-          <p:cNvPr id="11" name="TextBox 10"/>
-          <p:cNvSpPr txBox="1"/>
-          <p:nvPr/>
-        </p:nvSpPr>
-        <p:spPr>
-          <a:xfrm>
-            <a:off x="859536" y="4399444"/>
-            <a:ext cx="10619232" cy="245668"/>
-          </a:xfrm>
-          <a:prstGeom prst="rect">
-            <a:avLst/>
-          </a:prstGeom>
-          <a:noFill/>
-        </p:spPr>
-        <p:txBody>
-          <a:bodyPr wrap="square" lIns="0" rIns="0" tIns="0" bIns="0" anchor="t">
-            <a:noAutofit/>
-          </a:bodyPr>
-          <a:lstStyle/>
-          <a:p>
-            <a:pPr algn="l">
-              <a:lnSpc>
-                <a:spcPct val="120000"/>
-              </a:lnSpc>
-              <a:spcAft>
-                <a:spcPts val="400"/>
-              </a:spcAft>
-            </a:pPr>
-            <a:r>
-              <a:rPr sz="1600" b="0">
-                <a:solidFill>
-                  <a:srgbClr val="333333"/>
-                </a:solidFill>
-                <a:latin typeface="Inter"/>
-              </a:rPr>
-              <a:t>divergent thresholds/actions (extraction risk)</a:t>
-            </a:r>
-          </a:p>
-        </p:txBody>
-      </p:sp>
-      <p:sp>
-        <p:nvSpPr>
-          <p:cNvPr id="12" name="TextBox 11"/>
+          <a:bodyPr rtlCol="0" anchor="ctr" wrap="none" lIns="45720" rIns="45720" tIns="0" bIns="0">
+            <a:noAutofit/>
+          </a:bodyPr>
+          <a:lstStyle/>
+          <a:p>
+            <a:pPr algn="ctr">
+              <a:lnSpc>
+                <a:spcPct val="100000"/>
+              </a:lnSpc>
+            </a:pPr>
+            <a:r>
+              <a:rPr sz="1200" b="0">
+                <a:solidFill>
+                  <a:srgbClr val="5B39F3"/>
+                </a:solidFill>
+                <a:latin typeface="Fira Code"/>
+              </a:rPr>
+              <a:t>[DUPLICATED]  36</a:t>
+            </a:r>
+          </a:p>
+        </p:txBody>
+      </p:sp>
+      <p:sp>
+        <p:nvSpPr>
+          <p:cNvPr id="17" name="TextBox 16"/>
           <p:cNvSpPr txBox="1"/>
           <p:nvPr/>
         </p:nvSpPr>
@@ -7857,7 +8178,7 @@
         <a:cs typeface=""/>
       </a:minorFont>
     </a:fontScheme>
-    <a:fmtScheme name="Office">
+    <a:fmtScheme name="Blitzy">
       <a:fillStyleLst>
         <a:solidFill>
           <a:schemeClr val="phClr"/>

--- a/blitzy/presentations/ArduPilot_PNT_Reference_Audit_Executive_Brief.pptx
+++ b/blitzy/presentations/ArduPilot_PNT_Reference_Audit_Executive_Brief.pptx
@@ -795,7 +795,7 @@
                 </a:solidFill>
                 <a:latin typeface="Inter"/>
               </a:rPr>
-              <a:t>Findings in broad strokes, grouped by theme. A forthcoming comprehensive deck will carry the catalog detail.</a:t>
+              <a:t>Findings in broad strokes, grouped by theme.</a:t>
             </a:r>
           </a:p>
         </p:txBody>
@@ -1089,7 +1089,7 @@
                 </a:solidFill>
                 <a:latin typeface="Inter"/>
               </a:rPr>
-              <a:t>NEXT: a forthcoming comprehensive findings deck will carry every catalogued reference, the paired dependency maps, the 12-row instance mapping and the full coverage register.</a:t>
+              <a:t>Use the comprehensive findings deck for the catalogued detail behind these themes: every reference, the paired dependency maps, the 12-row instance mapping and the full coverage register.</a:t>
             </a:r>
           </a:p>
         </p:txBody>

--- a/blitzy/presentations/ArduPilot_PNT_Reference_Audit_Executive_Brief.pptx
+++ b/blitzy/presentations/ArduPilot_PNT_Reference_Audit_Executive_Brief.pptx
@@ -6947,7 +6947,7 @@
                 </a:solidFill>
                 <a:latin typeface="Inter"/>
               </a:rPr>
-              <a:t>Chains end in a mode refused or a failsafe landing.</a:t>
+              <a:t>Chains end in decisions such as mode denial, failsafe action, actuator limits, disarm.</a:t>
             </a:r>
           </a:p>
         </p:txBody>

--- a/blitzy/presentations/ArduPilot_PNT_Reference_Audit_Executive_Brief.pptx
+++ b/blitzy/presentations/ArduPilot_PNT_Reference_Audit_Executive_Brief.pptx
@@ -185,6 +185,92 @@
           <a:chExt cx="0" cy="0"/>
         </a:xfrm>
       </p:grpSpPr>
+      <p:sp>
+        <p:nvSpPr>
+          <p:cNvPr id="2" name="Rectangle 3"/>
+          <p:cNvSpPr/>
+          <p:nvPr/>
+        </p:nvSpPr>
+        <p:spPr>
+          <a:xfrm>
+            <a:off x="566928" y="1298448"/>
+            <a:ext cx="11058144" cy="32004"/>
+          </a:xfrm>
+          <a:prstGeom prst="rect">
+            <a:avLst/>
+          </a:prstGeom>
+          <a:solidFill>
+            <a:srgbClr val="D9D9D9"/>
+          </a:solidFill>
+          <a:ln>
+            <a:noFill/>
+          </a:ln>
+          <a:effectLst/>
+        </p:spPr>
+        <p:style>
+          <a:lnRef idx="1">
+            <a:schemeClr val="accent1"/>
+          </a:lnRef>
+          <a:fillRef idx="3">
+            <a:schemeClr val="accent1"/>
+          </a:fillRef>
+          <a:effectRef idx="0">
+            <a:schemeClr val="accent1"/>
+          </a:effectRef>
+          <a:fontRef idx="minor">
+            <a:schemeClr val="lt1"/>
+          </a:fontRef>
+        </p:style>
+        <p:txBody>
+          <a:bodyPr rtlCol="0" anchor="ctr"/>
+          <a:lstStyle/>
+          <a:p>
+            <a:pPr algn="ctr"/>
+          </a:p>
+        </p:txBody>
+      </p:sp>
+      <p:sp>
+        <p:nvSpPr>
+          <p:cNvPr id="3" name="TextBox 12"/>
+          <p:cNvSpPr txBox="1"/>
+          <p:nvPr/>
+        </p:nvSpPr>
+        <p:spPr>
+          <a:xfrm>
+            <a:off x="566928" y="6355080"/>
+            <a:ext cx="11058144" cy="156337"/>
+          </a:xfrm>
+          <a:prstGeom prst="rect">
+            <a:avLst/>
+          </a:prstGeom>
+          <a:noFill/>
+        </p:spPr>
+        <p:txBody>
+          <a:bodyPr wrap="square" lIns="0" rIns="0" tIns="0" bIns="0" anchor="t">
+            <a:noAutofit/>
+          </a:bodyPr>
+          <a:lstStyle/>
+          <a:p>
+            <a:pPr algn="l">
+              <a:lnSpc>
+                <a:spcPct val="100000"/>
+              </a:lnSpc>
+              <a:spcAft>
+                <a:spcPts val="0"/>
+              </a:spcAft>
+            </a:pPr>
+            <a:r>
+              <a:rPr sz="1000" b="0">
+                <a:solidFill>
+                  <a:srgbClr val="999999"/>
+                </a:solidFill>
+                <a:latin typeface="Fira Code"/>
+              </a:rPr>
+              <a:t>Source: ArduPilot_PNT_Reference_Audit.pdf  ·  audited HEAD 5b67e27b0a  ·  read-only static-analysis catalog  ·  every figure as stated</a:t>
+            </a:r>
+          </a:p>
+        </p:txBody>
+      </p:sp>
     </p:spTree>
   </p:cSld>
   <p:clrMapOvr>
@@ -1240,50 +1326,6 @@
       </p:sp>
       <p:sp>
         <p:nvSpPr>
-          <p:cNvPr id="4" name="Rectangle 3"/>
-          <p:cNvSpPr/>
-          <p:nvPr/>
-        </p:nvSpPr>
-        <p:spPr>
-          <a:xfrm>
-            <a:off x="566928" y="1298448"/>
-            <a:ext cx="11058144" cy="32004"/>
-          </a:xfrm>
-          <a:prstGeom prst="rect">
-            <a:avLst/>
-          </a:prstGeom>
-          <a:solidFill>
-            <a:srgbClr val="D9D9D9"/>
-          </a:solidFill>
-          <a:ln>
-            <a:noFill/>
-          </a:ln>
-          <a:effectLst/>
-        </p:spPr>
-        <p:style>
-          <a:lnRef idx="1">
-            <a:schemeClr val="accent1"/>
-          </a:lnRef>
-          <a:fillRef idx="3">
-            <a:schemeClr val="accent1"/>
-          </a:fillRef>
-          <a:effectRef idx="0">
-            <a:schemeClr val="accent1"/>
-          </a:effectRef>
-          <a:fontRef idx="minor">
-            <a:schemeClr val="lt1"/>
-          </a:fontRef>
-        </p:style>
-        <p:txBody>
-          <a:bodyPr rtlCol="0" anchor="ctr"/>
-          <a:lstStyle/>
-          <a:p>
-            <a:pPr algn="ctr"/>
-          </a:p>
-        </p:txBody>
-      </p:sp>
-      <p:sp>
-        <p:nvSpPr>
           <p:cNvPr id="5" name="TextBox 4"/>
           <p:cNvSpPr txBox="1"/>
           <p:nvPr/>
@@ -2190,48 +2232,6 @@
                 <a:latin typeface="Inter"/>
               </a:rPr>
               <a:t>checked absences</a:t>
-            </a:r>
-          </a:p>
-        </p:txBody>
-      </p:sp>
-      <p:sp>
-        <p:nvSpPr>
-          <p:cNvPr id="19" name="TextBox 18"/>
-          <p:cNvSpPr txBox="1"/>
-          <p:nvPr/>
-        </p:nvSpPr>
-        <p:spPr>
-          <a:xfrm>
-            <a:off x="566928" y="6355080"/>
-            <a:ext cx="11058144" cy="156337"/>
-          </a:xfrm>
-          <a:prstGeom prst="rect">
-            <a:avLst/>
-          </a:prstGeom>
-          <a:noFill/>
-        </p:spPr>
-        <p:txBody>
-          <a:bodyPr wrap="square" lIns="0" rIns="0" tIns="0" bIns="0" anchor="t">
-            <a:noAutofit/>
-          </a:bodyPr>
-          <a:lstStyle/>
-          <a:p>
-            <a:pPr algn="l">
-              <a:lnSpc>
-                <a:spcPct val="100000"/>
-              </a:lnSpc>
-              <a:spcAft>
-                <a:spcPts val="0"/>
-              </a:spcAft>
-            </a:pPr>
-            <a:r>
-              <a:rPr sz="1000" b="0">
-                <a:solidFill>
-                  <a:srgbClr val="999999"/>
-                </a:solidFill>
-                <a:latin typeface="Fira Code"/>
-              </a:rPr>
-              <a:t>Source: ArduPilot_PNT_Reference_Audit.pdf  ·  audited HEAD 5b67e27b0a  ·  read-only static-analysis catalog  ·  every figure as stated</a:t>
             </a:r>
           </a:p>
         </p:txBody>
@@ -2340,50 +2340,6 @@
       </p:sp>
       <p:sp>
         <p:nvSpPr>
-          <p:cNvPr id="4" name="Rectangle 3"/>
-          <p:cNvSpPr/>
-          <p:nvPr/>
-        </p:nvSpPr>
-        <p:spPr>
-          <a:xfrm>
-            <a:off x="566928" y="1298448"/>
-            <a:ext cx="11058144" cy="32004"/>
-          </a:xfrm>
-          <a:prstGeom prst="rect">
-            <a:avLst/>
-          </a:prstGeom>
-          <a:solidFill>
-            <a:srgbClr val="D9D9D9"/>
-          </a:solidFill>
-          <a:ln>
-            <a:noFill/>
-          </a:ln>
-          <a:effectLst/>
-        </p:spPr>
-        <p:style>
-          <a:lnRef idx="1">
-            <a:schemeClr val="accent1"/>
-          </a:lnRef>
-          <a:fillRef idx="3">
-            <a:schemeClr val="accent1"/>
-          </a:fillRef>
-          <a:effectRef idx="0">
-            <a:schemeClr val="accent1"/>
-          </a:effectRef>
-          <a:fontRef idx="minor">
-            <a:schemeClr val="lt1"/>
-          </a:fontRef>
-        </p:style>
-        <p:txBody>
-          <a:bodyPr rtlCol="0" anchor="ctr"/>
-          <a:lstStyle/>
-          <a:p>
-            <a:pPr algn="ctr"/>
-          </a:p>
-        </p:txBody>
-      </p:sp>
-      <p:sp>
-        <p:nvSpPr>
           <p:cNvPr id="5" name="TextBox 4"/>
           <p:cNvSpPr txBox="1"/>
           <p:nvPr/>
@@ -3401,48 +3357,6 @@
                 <a:latin typeface="Fira Code"/>
               </a:rPr>
               <a:t>[MULTI-CATEGORY]  7</a:t>
-            </a:r>
-          </a:p>
-        </p:txBody>
-      </p:sp>
-      <p:sp>
-        <p:nvSpPr>
-          <p:cNvPr id="25" name="TextBox 24"/>
-          <p:cNvSpPr txBox="1"/>
-          <p:nvPr/>
-        </p:nvSpPr>
-        <p:spPr>
-          <a:xfrm>
-            <a:off x="566928" y="6355080"/>
-            <a:ext cx="11058144" cy="156337"/>
-          </a:xfrm>
-          <a:prstGeom prst="rect">
-            <a:avLst/>
-          </a:prstGeom>
-          <a:noFill/>
-        </p:spPr>
-        <p:txBody>
-          <a:bodyPr wrap="square" lIns="0" rIns="0" tIns="0" bIns="0" anchor="t">
-            <a:noAutofit/>
-          </a:bodyPr>
-          <a:lstStyle/>
-          <a:p>
-            <a:pPr algn="l">
-              <a:lnSpc>
-                <a:spcPct val="100000"/>
-              </a:lnSpc>
-              <a:spcAft>
-                <a:spcPts val="0"/>
-              </a:spcAft>
-            </a:pPr>
-            <a:r>
-              <a:rPr sz="1000" b="0">
-                <a:solidFill>
-                  <a:srgbClr val="999999"/>
-                </a:solidFill>
-                <a:latin typeface="Fira Code"/>
-              </a:rPr>
-              <a:t>Source: ArduPilot_PNT_Reference_Audit.pdf  ·  audited HEAD 5b67e27b0a  ·  read-only static-analysis catalog  ·  every figure as stated</a:t>
             </a:r>
           </a:p>
         </p:txBody>
@@ -3551,50 +3465,6 @@
       </p:sp>
       <p:sp>
         <p:nvSpPr>
-          <p:cNvPr id="4" name="Rectangle 3"/>
-          <p:cNvSpPr/>
-          <p:nvPr/>
-        </p:nvSpPr>
-        <p:spPr>
-          <a:xfrm>
-            <a:off x="566928" y="1298448"/>
-            <a:ext cx="11058144" cy="32004"/>
-          </a:xfrm>
-          <a:prstGeom prst="rect">
-            <a:avLst/>
-          </a:prstGeom>
-          <a:solidFill>
-            <a:srgbClr val="D9D9D9"/>
-          </a:solidFill>
-          <a:ln>
-            <a:noFill/>
-          </a:ln>
-          <a:effectLst/>
-        </p:spPr>
-        <p:style>
-          <a:lnRef idx="1">
-            <a:schemeClr val="accent1"/>
-          </a:lnRef>
-          <a:fillRef idx="3">
-            <a:schemeClr val="accent1"/>
-          </a:fillRef>
-          <a:effectRef idx="0">
-            <a:schemeClr val="accent1"/>
-          </a:effectRef>
-          <a:fontRef idx="minor">
-            <a:schemeClr val="lt1"/>
-          </a:fontRef>
-        </p:style>
-        <p:txBody>
-          <a:bodyPr rtlCol="0" anchor="ctr"/>
-          <a:lstStyle/>
-          <a:p>
-            <a:pPr algn="ctr"/>
-          </a:p>
-        </p:txBody>
-      </p:sp>
-      <p:sp>
-        <p:nvSpPr>
           <p:cNvPr id="5" name="TextBox 4"/>
           <p:cNvSpPr txBox="1"/>
           <p:nvPr/>
@@ -4161,48 +4031,6 @@
                 <a:latin typeface="Fira Code"/>
               </a:rPr>
               <a:t>[DUPLICATED]  36</a:t>
-            </a:r>
-          </a:p>
-        </p:txBody>
-      </p:sp>
-      <p:sp>
-        <p:nvSpPr>
-          <p:cNvPr id="15" name="TextBox 14"/>
-          <p:cNvSpPr txBox="1"/>
-          <p:nvPr/>
-        </p:nvSpPr>
-        <p:spPr>
-          <a:xfrm>
-            <a:off x="566928" y="6355080"/>
-            <a:ext cx="11058144" cy="156337"/>
-          </a:xfrm>
-          <a:prstGeom prst="rect">
-            <a:avLst/>
-          </a:prstGeom>
-          <a:noFill/>
-        </p:spPr>
-        <p:txBody>
-          <a:bodyPr wrap="square" lIns="0" rIns="0" tIns="0" bIns="0" anchor="t">
-            <a:noAutofit/>
-          </a:bodyPr>
-          <a:lstStyle/>
-          <a:p>
-            <a:pPr algn="l">
-              <a:lnSpc>
-                <a:spcPct val="100000"/>
-              </a:lnSpc>
-              <a:spcAft>
-                <a:spcPts val="0"/>
-              </a:spcAft>
-            </a:pPr>
-            <a:r>
-              <a:rPr sz="1000" b="0">
-                <a:solidFill>
-                  <a:srgbClr val="999999"/>
-                </a:solidFill>
-                <a:latin typeface="Fira Code"/>
-              </a:rPr>
-              <a:t>Source: ArduPilot_PNT_Reference_Audit.pdf  ·  audited HEAD 5b67e27b0a  ·  read-only static-analysis catalog  ·  every figure as stated</a:t>
             </a:r>
           </a:p>
         </p:txBody>
@@ -4311,50 +4139,6 @@
       </p:sp>
       <p:sp>
         <p:nvSpPr>
-          <p:cNvPr id="4" name="Rectangle 3"/>
-          <p:cNvSpPr/>
-          <p:nvPr/>
-        </p:nvSpPr>
-        <p:spPr>
-          <a:xfrm>
-            <a:off x="566928" y="1298448"/>
-            <a:ext cx="11058144" cy="32004"/>
-          </a:xfrm>
-          <a:prstGeom prst="rect">
-            <a:avLst/>
-          </a:prstGeom>
-          <a:solidFill>
-            <a:srgbClr val="D9D9D9"/>
-          </a:solidFill>
-          <a:ln>
-            <a:noFill/>
-          </a:ln>
-          <a:effectLst/>
-        </p:spPr>
-        <p:style>
-          <a:lnRef idx="1">
-            <a:schemeClr val="accent1"/>
-          </a:lnRef>
-          <a:fillRef idx="3">
-            <a:schemeClr val="accent1"/>
-          </a:fillRef>
-          <a:effectRef idx="0">
-            <a:schemeClr val="accent1"/>
-          </a:effectRef>
-          <a:fontRef idx="minor">
-            <a:schemeClr val="lt1"/>
-          </a:fontRef>
-        </p:style>
-        <p:txBody>
-          <a:bodyPr rtlCol="0" anchor="ctr"/>
-          <a:lstStyle/>
-          <a:p>
-            <a:pPr algn="ctr"/>
-          </a:p>
-        </p:txBody>
-      </p:sp>
-      <p:sp>
-        <p:nvSpPr>
           <p:cNvPr id="5" name="TextBox 4"/>
           <p:cNvSpPr txBox="1"/>
           <p:nvPr/>
@@ -4946,48 +4730,6 @@
                 <a:latin typeface="Fira Code"/>
               </a:rPr>
               <a:t>[MULTI-CATEGORY]  7</a:t>
-            </a:r>
-          </a:p>
-        </p:txBody>
-      </p:sp>
-      <p:sp>
-        <p:nvSpPr>
-          <p:cNvPr id="17" name="TextBox 16"/>
-          <p:cNvSpPr txBox="1"/>
-          <p:nvPr/>
-        </p:nvSpPr>
-        <p:spPr>
-          <a:xfrm>
-            <a:off x="566928" y="6355080"/>
-            <a:ext cx="11058144" cy="156337"/>
-          </a:xfrm>
-          <a:prstGeom prst="rect">
-            <a:avLst/>
-          </a:prstGeom>
-          <a:noFill/>
-        </p:spPr>
-        <p:txBody>
-          <a:bodyPr wrap="square" lIns="0" rIns="0" tIns="0" bIns="0" anchor="t">
-            <a:noAutofit/>
-          </a:bodyPr>
-          <a:lstStyle/>
-          <a:p>
-            <a:pPr algn="l">
-              <a:lnSpc>
-                <a:spcPct val="100000"/>
-              </a:lnSpc>
-              <a:spcAft>
-                <a:spcPts val="0"/>
-              </a:spcAft>
-            </a:pPr>
-            <a:r>
-              <a:rPr sz="1000" b="0">
-                <a:solidFill>
-                  <a:srgbClr val="999999"/>
-                </a:solidFill>
-                <a:latin typeface="Fira Code"/>
-              </a:rPr>
-              <a:t>Source: ArduPilot_PNT_Reference_Audit.pdf  ·  audited HEAD 5b67e27b0a  ·  read-only static-analysis catalog  ·  every figure as stated</a:t>
             </a:r>
           </a:p>
         </p:txBody>
@@ -5096,50 +4838,6 @@
       </p:sp>
       <p:sp>
         <p:nvSpPr>
-          <p:cNvPr id="4" name="Rectangle 3"/>
-          <p:cNvSpPr/>
-          <p:nvPr/>
-        </p:nvSpPr>
-        <p:spPr>
-          <a:xfrm>
-            <a:off x="566928" y="1298448"/>
-            <a:ext cx="11058144" cy="32004"/>
-          </a:xfrm>
-          <a:prstGeom prst="rect">
-            <a:avLst/>
-          </a:prstGeom>
-          <a:solidFill>
-            <a:srgbClr val="D9D9D9"/>
-          </a:solidFill>
-          <a:ln>
-            <a:noFill/>
-          </a:ln>
-          <a:effectLst/>
-        </p:spPr>
-        <p:style>
-          <a:lnRef idx="1">
-            <a:schemeClr val="accent1"/>
-          </a:lnRef>
-          <a:fillRef idx="3">
-            <a:schemeClr val="accent1"/>
-          </a:fillRef>
-          <a:effectRef idx="0">
-            <a:schemeClr val="accent1"/>
-          </a:effectRef>
-          <a:fontRef idx="minor">
-            <a:schemeClr val="lt1"/>
-          </a:fontRef>
-        </p:style>
-        <p:txBody>
-          <a:bodyPr rtlCol="0" anchor="ctr"/>
-          <a:lstStyle/>
-          <a:p>
-            <a:pPr algn="ctr"/>
-          </a:p>
-        </p:txBody>
-      </p:sp>
-      <p:sp>
-        <p:nvSpPr>
           <p:cNvPr id="5" name="TextBox 4"/>
           <p:cNvSpPr txBox="1"/>
           <p:nvPr/>
@@ -5692,48 +5390,6 @@
                 <a:latin typeface="Inter"/>
               </a:rPr>
               <a:t>Explicitly-documented absences catalogued in the Coverage register: 27.</a:t>
-            </a:r>
-          </a:p>
-        </p:txBody>
-      </p:sp>
-      <p:sp>
-        <p:nvSpPr>
-          <p:cNvPr id="13" name="TextBox 12"/>
-          <p:cNvSpPr txBox="1"/>
-          <p:nvPr/>
-        </p:nvSpPr>
-        <p:spPr>
-          <a:xfrm>
-            <a:off x="566928" y="6355080"/>
-            <a:ext cx="11058144" cy="156337"/>
-          </a:xfrm>
-          <a:prstGeom prst="rect">
-            <a:avLst/>
-          </a:prstGeom>
-          <a:noFill/>
-        </p:spPr>
-        <p:txBody>
-          <a:bodyPr wrap="square" lIns="0" rIns="0" tIns="0" bIns="0" anchor="t">
-            <a:noAutofit/>
-          </a:bodyPr>
-          <a:lstStyle/>
-          <a:p>
-            <a:pPr algn="l">
-              <a:lnSpc>
-                <a:spcPct val="100000"/>
-              </a:lnSpc>
-              <a:spcAft>
-                <a:spcPts val="0"/>
-              </a:spcAft>
-            </a:pPr>
-            <a:r>
-              <a:rPr sz="1000" b="0">
-                <a:solidFill>
-                  <a:srgbClr val="999999"/>
-                </a:solidFill>
-                <a:latin typeface="Fira Code"/>
-              </a:rPr>
-              <a:t>Source: ArduPilot_PNT_Reference_Audit.pdf  ·  audited HEAD 5b67e27b0a  ·  read-only static-analysis catalog  ·  every figure as stated</a:t>
             </a:r>
           </a:p>
         </p:txBody>
@@ -5842,50 +5498,6 @@
       </p:sp>
       <p:sp>
         <p:nvSpPr>
-          <p:cNvPr id="4" name="Rectangle 3"/>
-          <p:cNvSpPr/>
-          <p:nvPr/>
-        </p:nvSpPr>
-        <p:spPr>
-          <a:xfrm>
-            <a:off x="566928" y="1298448"/>
-            <a:ext cx="11058144" cy="32004"/>
-          </a:xfrm>
-          <a:prstGeom prst="rect">
-            <a:avLst/>
-          </a:prstGeom>
-          <a:solidFill>
-            <a:srgbClr val="D9D9D9"/>
-          </a:solidFill>
-          <a:ln>
-            <a:noFill/>
-          </a:ln>
-          <a:effectLst/>
-        </p:spPr>
-        <p:style>
-          <a:lnRef idx="1">
-            <a:schemeClr val="accent1"/>
-          </a:lnRef>
-          <a:fillRef idx="3">
-            <a:schemeClr val="accent1"/>
-          </a:fillRef>
-          <a:effectRef idx="0">
-            <a:schemeClr val="accent1"/>
-          </a:effectRef>
-          <a:fontRef idx="minor">
-            <a:schemeClr val="lt1"/>
-          </a:fontRef>
-        </p:style>
-        <p:txBody>
-          <a:bodyPr rtlCol="0" anchor="ctr"/>
-          <a:lstStyle/>
-          <a:p>
-            <a:pPr algn="ctr"/>
-          </a:p>
-        </p:txBody>
-      </p:sp>
-      <p:sp>
-        <p:nvSpPr>
           <p:cNvPr id="5" name="TextBox 4"/>
           <p:cNvSpPr txBox="1"/>
           <p:nvPr/>
@@ -6620,48 +6232,6 @@
                 <a:latin typeface="Fira Code"/>
               </a:rPr>
               <a:t>[DUPLICATED]  36</a:t>
-            </a:r>
-          </a:p>
-        </p:txBody>
-      </p:sp>
-      <p:sp>
-        <p:nvSpPr>
-          <p:cNvPr id="20" name="TextBox 19"/>
-          <p:cNvSpPr txBox="1"/>
-          <p:nvPr/>
-        </p:nvSpPr>
-        <p:spPr>
-          <a:xfrm>
-            <a:off x="566928" y="6355080"/>
-            <a:ext cx="11058144" cy="156337"/>
-          </a:xfrm>
-          <a:prstGeom prst="rect">
-            <a:avLst/>
-          </a:prstGeom>
-          <a:noFill/>
-        </p:spPr>
-        <p:txBody>
-          <a:bodyPr wrap="square" lIns="0" rIns="0" tIns="0" bIns="0" anchor="t">
-            <a:noAutofit/>
-          </a:bodyPr>
-          <a:lstStyle/>
-          <a:p>
-            <a:pPr algn="l">
-              <a:lnSpc>
-                <a:spcPct val="100000"/>
-              </a:lnSpc>
-              <a:spcAft>
-                <a:spcPts val="0"/>
-              </a:spcAft>
-            </a:pPr>
-            <a:r>
-              <a:rPr sz="1000" b="0">
-                <a:solidFill>
-                  <a:srgbClr val="999999"/>
-                </a:solidFill>
-                <a:latin typeface="Fira Code"/>
-              </a:rPr>
-              <a:t>Source: ArduPilot_PNT_Reference_Audit.pdf  ·  audited HEAD 5b67e27b0a  ·  read-only static-analysis catalog  ·  every figure as stated</a:t>
             </a:r>
           </a:p>
         </p:txBody>
@@ -6770,50 +6340,6 @@
       </p:sp>
       <p:sp>
         <p:nvSpPr>
-          <p:cNvPr id="4" name="Rectangle 3"/>
-          <p:cNvSpPr/>
-          <p:nvPr/>
-        </p:nvSpPr>
-        <p:spPr>
-          <a:xfrm>
-            <a:off x="566928" y="1298448"/>
-            <a:ext cx="11058144" cy="32004"/>
-          </a:xfrm>
-          <a:prstGeom prst="rect">
-            <a:avLst/>
-          </a:prstGeom>
-          <a:solidFill>
-            <a:srgbClr val="D9D9D9"/>
-          </a:solidFill>
-          <a:ln>
-            <a:noFill/>
-          </a:ln>
-          <a:effectLst/>
-        </p:spPr>
-        <p:style>
-          <a:lnRef idx="1">
-            <a:schemeClr val="accent1"/>
-          </a:lnRef>
-          <a:fillRef idx="3">
-            <a:schemeClr val="accent1"/>
-          </a:fillRef>
-          <a:effectRef idx="0">
-            <a:schemeClr val="accent1"/>
-          </a:effectRef>
-          <a:fontRef idx="minor">
-            <a:schemeClr val="lt1"/>
-          </a:fontRef>
-        </p:style>
-        <p:txBody>
-          <a:bodyPr rtlCol="0" anchor="ctr"/>
-          <a:lstStyle/>
-          <a:p>
-            <a:pPr algn="ctr"/>
-          </a:p>
-        </p:txBody>
-      </p:sp>
-      <p:sp>
-        <p:nvSpPr>
           <p:cNvPr id="5" name="TextBox 4"/>
           <p:cNvSpPr txBox="1"/>
           <p:nvPr/>
@@ -7401,48 +6927,6 @@
                 <a:latin typeface="Fira Code"/>
               </a:rPr>
               <a:t>[DUPLICATED]  36</a:t>
-            </a:r>
-          </a:p>
-        </p:txBody>
-      </p:sp>
-      <p:sp>
-        <p:nvSpPr>
-          <p:cNvPr id="17" name="TextBox 16"/>
-          <p:cNvSpPr txBox="1"/>
-          <p:nvPr/>
-        </p:nvSpPr>
-        <p:spPr>
-          <a:xfrm>
-            <a:off x="566928" y="6355080"/>
-            <a:ext cx="11058144" cy="156337"/>
-          </a:xfrm>
-          <a:prstGeom prst="rect">
-            <a:avLst/>
-          </a:prstGeom>
-          <a:noFill/>
-        </p:spPr>
-        <p:txBody>
-          <a:bodyPr wrap="square" lIns="0" rIns="0" tIns="0" bIns="0" anchor="t">
-            <a:noAutofit/>
-          </a:bodyPr>
-          <a:lstStyle/>
-          <a:p>
-            <a:pPr algn="l">
-              <a:lnSpc>
-                <a:spcPct val="100000"/>
-              </a:lnSpc>
-              <a:spcAft>
-                <a:spcPts val="0"/>
-              </a:spcAft>
-            </a:pPr>
-            <a:r>
-              <a:rPr sz="1000" b="0">
-                <a:solidFill>
-                  <a:srgbClr val="999999"/>
-                </a:solidFill>
-                <a:latin typeface="Fira Code"/>
-              </a:rPr>
-              <a:t>Source: ArduPilot_PNT_Reference_Audit.pdf  ·  audited HEAD 5b67e27b0a  ·  read-only static-analysis catalog  ·  every figure as stated</a:t>
             </a:r>
           </a:p>
         </p:txBody>
@@ -7551,50 +7035,6 @@
       </p:sp>
       <p:sp>
         <p:nvSpPr>
-          <p:cNvPr id="4" name="Rectangle 3"/>
-          <p:cNvSpPr/>
-          <p:nvPr/>
-        </p:nvSpPr>
-        <p:spPr>
-          <a:xfrm>
-            <a:off x="566928" y="1298448"/>
-            <a:ext cx="11058144" cy="32004"/>
-          </a:xfrm>
-          <a:prstGeom prst="rect">
-            <a:avLst/>
-          </a:prstGeom>
-          <a:solidFill>
-            <a:srgbClr val="D9D9D9"/>
-          </a:solidFill>
-          <a:ln>
-            <a:noFill/>
-          </a:ln>
-          <a:effectLst/>
-        </p:spPr>
-        <p:style>
-          <a:lnRef idx="1">
-            <a:schemeClr val="accent1"/>
-          </a:lnRef>
-          <a:fillRef idx="3">
-            <a:schemeClr val="accent1"/>
-          </a:fillRef>
-          <a:effectRef idx="0">
-            <a:schemeClr val="accent1"/>
-          </a:effectRef>
-          <a:fontRef idx="minor">
-            <a:schemeClr val="lt1"/>
-          </a:fontRef>
-        </p:style>
-        <p:txBody>
-          <a:bodyPr rtlCol="0" anchor="ctr"/>
-          <a:lstStyle/>
-          <a:p>
-            <a:pPr algn="ctr"/>
-          </a:p>
-        </p:txBody>
-      </p:sp>
-      <p:sp>
-        <p:nvSpPr>
           <p:cNvPr id="5" name="TextBox 4"/>
           <p:cNvSpPr txBox="1"/>
           <p:nvPr/>
@@ -8071,48 +7511,6 @@
                 <a:latin typeface="Inter"/>
               </a:rPr>
               <a:t>Traceability: the audit contains no numbered recommendations register and no numeric severity scale, so every item above traces to its current → new service mapping, to its Audit-Discipline Flags taxonomy, or to its Provenance statement.</a:t>
-            </a:r>
-          </a:p>
-        </p:txBody>
-      </p:sp>
-      <p:sp>
-        <p:nvSpPr>
-          <p:cNvPr id="13" name="TextBox 12"/>
-          <p:cNvSpPr txBox="1"/>
-          <p:nvPr/>
-        </p:nvSpPr>
-        <p:spPr>
-          <a:xfrm>
-            <a:off x="566928" y="6355080"/>
-            <a:ext cx="11058144" cy="156337"/>
-          </a:xfrm>
-          <a:prstGeom prst="rect">
-            <a:avLst/>
-          </a:prstGeom>
-          <a:noFill/>
-        </p:spPr>
-        <p:txBody>
-          <a:bodyPr wrap="square" lIns="0" rIns="0" tIns="0" bIns="0" anchor="t">
-            <a:noAutofit/>
-          </a:bodyPr>
-          <a:lstStyle/>
-          <a:p>
-            <a:pPr algn="l">
-              <a:lnSpc>
-                <a:spcPct val="100000"/>
-              </a:lnSpc>
-              <a:spcAft>
-                <a:spcPts val="0"/>
-              </a:spcAft>
-            </a:pPr>
-            <a:r>
-              <a:rPr sz="1000" b="0">
-                <a:solidFill>
-                  <a:srgbClr val="999999"/>
-                </a:solidFill>
-                <a:latin typeface="Fira Code"/>
-              </a:rPr>
-              <a:t>Source: ArduPilot_PNT_Reference_Audit.pdf  ·  audited HEAD 5b67e27b0a  ·  read-only static-analysis catalog  ·  every figure as stated</a:t>
             </a:r>
           </a:p>
         </p:txBody>

--- a/blitzy/presentations/ArduPilot_PNT_Reference_Audit_Executive_Brief.pptx
+++ b/blitzy/presentations/ArduPilot_PNT_Reference_Audit_Executive_Brief.pptx
@@ -1374,7 +1374,7 @@
         </p:nvSpPr>
         <p:spPr>
           <a:xfrm>
-            <a:off x="566928" y="1852079"/>
+            <a:off x="566928" y="1888655"/>
             <a:ext cx="11058144" cy="225704"/>
           </a:xfrm>
           <a:prstGeom prst="rect">
@@ -1416,7 +1416,7 @@
         </p:nvSpPr>
         <p:spPr>
           <a:xfrm>
-            <a:off x="566928" y="2077783"/>
+            <a:off x="566928" y="2114359"/>
             <a:ext cx="32004" cy="589076"/>
           </a:xfrm>
           <a:prstGeom prst="rect">
@@ -1460,7 +1460,7 @@
         </p:nvSpPr>
         <p:spPr>
           <a:xfrm>
-            <a:off x="713232" y="2077783"/>
+            <a:off x="713232" y="2114359"/>
             <a:ext cx="8494776" cy="589076"/>
           </a:xfrm>
           <a:prstGeom prst="rect">
@@ -1502,7 +1502,7 @@
         </p:nvSpPr>
         <p:spPr>
           <a:xfrm>
-            <a:off x="566928" y="2740011"/>
+            <a:off x="566928" y="2776587"/>
             <a:ext cx="32004" cy="589076"/>
           </a:xfrm>
           <a:prstGeom prst="rect">
@@ -1546,7 +1546,7 @@
         </p:nvSpPr>
         <p:spPr>
           <a:xfrm>
-            <a:off x="713232" y="2740011"/>
+            <a:off x="713232" y="2776587"/>
             <a:ext cx="8494776" cy="589076"/>
           </a:xfrm>
           <a:prstGeom prst="rect">
@@ -1588,7 +1588,7 @@
         </p:nvSpPr>
         <p:spPr>
           <a:xfrm>
-            <a:off x="566928" y="3511967"/>
+            <a:off x="566928" y="3566831"/>
             <a:ext cx="2613660" cy="1051560"/>
           </a:xfrm>
           <a:prstGeom prst="roundRect">
@@ -1670,7 +1670,7 @@
         </p:nvSpPr>
         <p:spPr>
           <a:xfrm>
-            <a:off x="3381756" y="3511967"/>
+            <a:off x="3381756" y="3566831"/>
             <a:ext cx="2613660" cy="1051560"/>
           </a:xfrm>
           <a:prstGeom prst="roundRect">
@@ -1752,7 +1752,7 @@
         </p:nvSpPr>
         <p:spPr>
           <a:xfrm>
-            <a:off x="6196584" y="3511967"/>
+            <a:off x="6196584" y="3566831"/>
             <a:ext cx="2613660" cy="1051560"/>
           </a:xfrm>
           <a:prstGeom prst="roundRect">
@@ -1834,7 +1834,7 @@
         </p:nvSpPr>
         <p:spPr>
           <a:xfrm>
-            <a:off x="9011412" y="3511967"/>
+            <a:off x="9011412" y="3566831"/>
             <a:ext cx="2613660" cy="1051560"/>
           </a:xfrm>
           <a:prstGeom prst="roundRect">
@@ -1916,7 +1916,7 @@
         </p:nvSpPr>
         <p:spPr>
           <a:xfrm>
-            <a:off x="566928" y="4691543"/>
+            <a:off x="566928" y="4801271"/>
             <a:ext cx="2613660" cy="1051560"/>
           </a:xfrm>
           <a:prstGeom prst="roundRect">
@@ -1998,7 +1998,7 @@
         </p:nvSpPr>
         <p:spPr>
           <a:xfrm>
-            <a:off x="3381756" y="4691543"/>
+            <a:off x="3381756" y="4801271"/>
             <a:ext cx="2613660" cy="1051560"/>
           </a:xfrm>
           <a:prstGeom prst="roundRect">
@@ -2080,7 +2080,7 @@
         </p:nvSpPr>
         <p:spPr>
           <a:xfrm>
-            <a:off x="6196584" y="4691543"/>
+            <a:off x="6196584" y="4801271"/>
             <a:ext cx="2613660" cy="1051560"/>
           </a:xfrm>
           <a:prstGeom prst="roundRect">
@@ -2162,7 +2162,7 @@
         </p:nvSpPr>
         <p:spPr>
           <a:xfrm>
-            <a:off x="9011412" y="4691543"/>
+            <a:off x="9011412" y="4801271"/>
             <a:ext cx="2613660" cy="1051560"/>
           </a:xfrm>
           <a:prstGeom prst="roundRect">
@@ -2388,7 +2388,7 @@
         </p:nvSpPr>
         <p:spPr>
           <a:xfrm>
-            <a:off x="566928" y="1852079"/>
+            <a:off x="566928" y="1797215"/>
             <a:ext cx="11058144" cy="1193292"/>
           </a:xfrm>
           <a:prstGeom prst="rect">
@@ -2486,7 +2486,7 @@
         </p:nvSpPr>
         <p:spPr>
           <a:xfrm>
-            <a:off x="566928" y="3191675"/>
+            <a:off x="566928" y="3100235"/>
             <a:ext cx="11058144" cy="728471"/>
           </a:xfrm>
           <a:prstGeom prst="roundRect">
@@ -2534,7 +2534,7 @@
         </p:nvSpPr>
         <p:spPr>
           <a:xfrm>
-            <a:off x="713232" y="3337979"/>
+            <a:off x="713232" y="3246539"/>
             <a:ext cx="10765536" cy="187604"/>
           </a:xfrm>
           <a:prstGeom prst="rect">
@@ -2559,7 +2559,7 @@
             <a:r>
               <a:rPr sz="1200" b="0">
                 <a:solidFill>
-                  <a:srgbClr val="5B39F3"/>
+                  <a:srgbClr val="999999"/>
                 </a:solidFill>
                 <a:latin typeface="Fira Code"/>
               </a:rPr>
@@ -2576,8 +2576,8 @@
         </p:nvSpPr>
         <p:spPr>
           <a:xfrm>
-            <a:off x="713232" y="3589591"/>
-            <a:ext cx="10765536" cy="184251"/>
+            <a:off x="859536" y="3498151"/>
+            <a:ext cx="10619232" cy="184251"/>
           </a:xfrm>
           <a:prstGeom prst="rect">
             <a:avLst/>
@@ -2601,7 +2601,7 @@
             <a:r>
               <a:rPr sz="1200" b="0">
                 <a:solidFill>
-                  <a:srgbClr val="999999"/>
+                  <a:srgbClr val="333333"/>
                 </a:solidFill>
                 <a:latin typeface="Inter"/>
               </a:rPr>
@@ -2618,7 +2618,7 @@
         </p:nvSpPr>
         <p:spPr>
           <a:xfrm>
-            <a:off x="566928" y="4066450"/>
+            <a:off x="566928" y="3938434"/>
             <a:ext cx="11058144" cy="225704"/>
           </a:xfrm>
           <a:prstGeom prst="rect">
@@ -2660,7 +2660,7 @@
         </p:nvSpPr>
         <p:spPr>
           <a:xfrm>
-            <a:off x="566928" y="4356162"/>
+            <a:off x="566928" y="4228146"/>
             <a:ext cx="5396484" cy="1183080"/>
           </a:xfrm>
           <a:prstGeom prst="roundRect">
@@ -2708,7 +2708,7 @@
         </p:nvSpPr>
         <p:spPr>
           <a:xfrm>
-            <a:off x="713232" y="4502466"/>
+            <a:off x="713232" y="4374450"/>
             <a:ext cx="5103876" cy="187604"/>
           </a:xfrm>
           <a:prstGeom prst="rect">
@@ -2750,7 +2750,7 @@
         </p:nvSpPr>
         <p:spPr>
           <a:xfrm>
-            <a:off x="713232" y="4781510"/>
+            <a:off x="713232" y="4653494"/>
             <a:ext cx="1607593" cy="274320"/>
           </a:xfrm>
           <a:prstGeom prst="roundRect">
@@ -2813,7 +2813,7 @@
         </p:nvSpPr>
         <p:spPr>
           <a:xfrm>
-            <a:off x="2439697" y="4781510"/>
+            <a:off x="2439697" y="4653494"/>
             <a:ext cx="1701355" cy="274320"/>
           </a:xfrm>
           <a:prstGeom prst="roundRect">
@@ -2876,7 +2876,7 @@
         </p:nvSpPr>
         <p:spPr>
           <a:xfrm>
-            <a:off x="713232" y="5147270"/>
+            <a:off x="713232" y="5019254"/>
             <a:ext cx="32004" cy="245668"/>
           </a:xfrm>
           <a:prstGeom prst="rect">
@@ -2920,7 +2920,7 @@
         </p:nvSpPr>
         <p:spPr>
           <a:xfrm>
-            <a:off x="859536" y="5147270"/>
+            <a:off x="859536" y="5019254"/>
             <a:ext cx="4957572" cy="245668"/>
           </a:xfrm>
           <a:prstGeom prst="rect">
@@ -2962,7 +2962,7 @@
         </p:nvSpPr>
         <p:spPr>
           <a:xfrm>
-            <a:off x="6228588" y="4356162"/>
+            <a:off x="6228588" y="4228146"/>
             <a:ext cx="5396484" cy="1183080"/>
           </a:xfrm>
           <a:prstGeom prst="roundRect">
@@ -3010,7 +3010,7 @@
         </p:nvSpPr>
         <p:spPr>
           <a:xfrm>
-            <a:off x="6374892" y="4502466"/>
+            <a:off x="6374892" y="4374450"/>
             <a:ext cx="5103876" cy="187604"/>
           </a:xfrm>
           <a:prstGeom prst="rect">
@@ -3052,7 +3052,7 @@
         </p:nvSpPr>
         <p:spPr>
           <a:xfrm>
-            <a:off x="6374892" y="4781510"/>
+            <a:off x="6374892" y="4653494"/>
             <a:ext cx="1607593" cy="274320"/>
           </a:xfrm>
           <a:prstGeom prst="roundRect">
@@ -3115,7 +3115,7 @@
         </p:nvSpPr>
         <p:spPr>
           <a:xfrm>
-            <a:off x="6374892" y="5147270"/>
+            <a:off x="6374892" y="5019254"/>
             <a:ext cx="32004" cy="245668"/>
           </a:xfrm>
           <a:prstGeom prst="rect">
@@ -3159,7 +3159,7 @@
         </p:nvSpPr>
         <p:spPr>
           <a:xfrm>
-            <a:off x="6521196" y="5147270"/>
+            <a:off x="6521196" y="5019254"/>
             <a:ext cx="4957572" cy="245668"/>
           </a:xfrm>
           <a:prstGeom prst="rect">
@@ -3201,7 +3201,7 @@
         </p:nvSpPr>
         <p:spPr>
           <a:xfrm>
-            <a:off x="566928" y="5685546"/>
+            <a:off x="566928" y="5520954"/>
             <a:ext cx="11058144" cy="225704"/>
           </a:xfrm>
           <a:prstGeom prst="rect">
@@ -3243,7 +3243,7 @@
         </p:nvSpPr>
         <p:spPr>
           <a:xfrm>
-            <a:off x="566928" y="5911250"/>
+            <a:off x="566928" y="5746658"/>
             <a:ext cx="1982640" cy="274320"/>
           </a:xfrm>
           <a:prstGeom prst="roundRect">
@@ -3306,7 +3306,7 @@
         </p:nvSpPr>
         <p:spPr>
           <a:xfrm>
-            <a:off x="2668440" y="5911250"/>
+            <a:off x="2668440" y="5746658"/>
             <a:ext cx="1982640" cy="274320"/>
           </a:xfrm>
           <a:prstGeom prst="roundRect">
@@ -3358,6 +3358,50 @@
               </a:rPr>
               <a:t>[MULTI-CATEGORY]  7</a:t>
             </a:r>
+          </a:p>
+        </p:txBody>
+      </p:sp>
+      <p:sp>
+        <p:nvSpPr>
+          <p:cNvPr id="15" name="Rectangle 14"/>
+          <p:cNvSpPr/>
+          <p:nvPr/>
+        </p:nvSpPr>
+        <p:spPr>
+          <a:xfrm>
+            <a:off x="713232" y="3498151"/>
+            <a:ext cx="32004" cy="184251"/>
+          </a:xfrm>
+          <a:prstGeom prst="rect">
+            <a:avLst/>
+          </a:prstGeom>
+          <a:solidFill>
+            <a:srgbClr val="5B39F3"/>
+          </a:solidFill>
+          <a:ln>
+            <a:noFill/>
+          </a:ln>
+          <a:effectLst/>
+        </p:spPr>
+        <p:style>
+          <a:lnRef idx="1">
+            <a:schemeClr val="accent1"/>
+          </a:lnRef>
+          <a:fillRef idx="3">
+            <a:schemeClr val="accent1"/>
+          </a:fillRef>
+          <a:effectRef idx="0">
+            <a:schemeClr val="accent1"/>
+          </a:effectRef>
+          <a:fontRef idx="minor">
+            <a:schemeClr val="lt1"/>
+          </a:fontRef>
+        </p:style>
+        <p:txBody>
+          <a:bodyPr rtlCol="0" anchor="ctr"/>
+          <a:lstStyle/>
+          <a:p>
+            <a:pPr algn="ctr"/>
           </a:p>
         </p:txBody>
       </p:sp>
@@ -3513,7 +3557,7 @@
         </p:nvSpPr>
         <p:spPr>
           <a:xfrm>
-            <a:off x="566928" y="1852079"/>
+            <a:off x="566928" y="1980095"/>
             <a:ext cx="11058144" cy="1609953"/>
           </a:xfrm>
           <a:prstGeom prst="rect">
@@ -3636,7 +3680,7 @@
         </p:nvSpPr>
         <p:spPr>
           <a:xfrm>
-            <a:off x="566928" y="3608336"/>
+            <a:off x="566928" y="3882656"/>
             <a:ext cx="11058144" cy="1183080"/>
           </a:xfrm>
           <a:prstGeom prst="roundRect">
@@ -3684,7 +3728,7 @@
         </p:nvSpPr>
         <p:spPr>
           <a:xfrm>
-            <a:off x="713232" y="3754640"/>
+            <a:off x="713232" y="4028960"/>
             <a:ext cx="10765536" cy="187604"/>
           </a:xfrm>
           <a:prstGeom prst="rect">
@@ -3726,7 +3770,7 @@
         </p:nvSpPr>
         <p:spPr>
           <a:xfrm>
-            <a:off x="713232" y="4033684"/>
+            <a:off x="713232" y="4308004"/>
             <a:ext cx="1138785" cy="274320"/>
           </a:xfrm>
           <a:prstGeom prst="roundRect">
@@ -3789,7 +3833,7 @@
         </p:nvSpPr>
         <p:spPr>
           <a:xfrm>
-            <a:off x="713232" y="4399444"/>
+            <a:off x="713232" y="4673764"/>
             <a:ext cx="32004" cy="245668"/>
           </a:xfrm>
           <a:prstGeom prst="rect">
@@ -3833,7 +3877,7 @@
         </p:nvSpPr>
         <p:spPr>
           <a:xfrm>
-            <a:off x="859536" y="4399444"/>
+            <a:off x="859536" y="4673764"/>
             <a:ext cx="10619232" cy="245668"/>
           </a:xfrm>
           <a:prstGeom prst="rect">
@@ -3875,7 +3919,7 @@
         </p:nvSpPr>
         <p:spPr>
           <a:xfrm>
-            <a:off x="566928" y="4937720"/>
+            <a:off x="566928" y="5340056"/>
             <a:ext cx="11058144" cy="225704"/>
           </a:xfrm>
           <a:prstGeom prst="rect">
@@ -3917,7 +3961,7 @@
         </p:nvSpPr>
         <p:spPr>
           <a:xfrm>
-            <a:off x="566928" y="5163424"/>
+            <a:off x="566928" y="5565760"/>
             <a:ext cx="1420070" cy="274320"/>
           </a:xfrm>
           <a:prstGeom prst="roundRect">
@@ -3980,7 +4024,7 @@
         </p:nvSpPr>
         <p:spPr>
           <a:xfrm>
-            <a:off x="2105870" y="5163424"/>
+            <a:off x="2105870" y="5565760"/>
             <a:ext cx="1701355" cy="274320"/>
           </a:xfrm>
           <a:prstGeom prst="roundRect">
@@ -4187,7 +4231,7 @@
         </p:nvSpPr>
         <p:spPr>
           <a:xfrm>
-            <a:off x="566928" y="1852079"/>
+            <a:off x="566928" y="1906943"/>
             <a:ext cx="11058144" cy="1193292"/>
           </a:xfrm>
           <a:prstGeom prst="rect">
@@ -4285,7 +4329,7 @@
         </p:nvSpPr>
         <p:spPr>
           <a:xfrm>
-            <a:off x="566928" y="3191675"/>
+            <a:off x="566928" y="3301403"/>
             <a:ext cx="11058144" cy="817320"/>
           </a:xfrm>
           <a:prstGeom prst="roundRect">
@@ -4333,7 +4377,7 @@
         </p:nvSpPr>
         <p:spPr>
           <a:xfrm>
-            <a:off x="713232" y="3337979"/>
+            <a:off x="713232" y="3447707"/>
             <a:ext cx="10765536" cy="187604"/>
           </a:xfrm>
           <a:prstGeom prst="rect">
@@ -4375,7 +4419,7 @@
         </p:nvSpPr>
         <p:spPr>
           <a:xfrm>
-            <a:off x="713232" y="3617023"/>
+            <a:off x="713232" y="3726751"/>
             <a:ext cx="32004" cy="245668"/>
           </a:xfrm>
           <a:prstGeom prst="rect">
@@ -4419,7 +4463,7 @@
         </p:nvSpPr>
         <p:spPr>
           <a:xfrm>
-            <a:off x="859536" y="3617023"/>
+            <a:off x="859536" y="3726751"/>
             <a:ext cx="10619232" cy="245668"/>
           </a:xfrm>
           <a:prstGeom prst="rect">
@@ -4461,7 +4505,7 @@
         </p:nvSpPr>
         <p:spPr>
           <a:xfrm>
-            <a:off x="566928" y="4137011"/>
+            <a:off x="566928" y="4319891"/>
             <a:ext cx="11058144" cy="817320"/>
           </a:xfrm>
           <a:prstGeom prst="roundRect">
@@ -4509,7 +4553,7 @@
         </p:nvSpPr>
         <p:spPr>
           <a:xfrm>
-            <a:off x="713232" y="4283315"/>
+            <a:off x="713232" y="4466195"/>
             <a:ext cx="10765536" cy="187604"/>
           </a:xfrm>
           <a:prstGeom prst="rect">
@@ -4551,7 +4595,7 @@
         </p:nvSpPr>
         <p:spPr>
           <a:xfrm>
-            <a:off x="713232" y="4562359"/>
+            <a:off x="713232" y="4745239"/>
             <a:ext cx="32004" cy="245668"/>
           </a:xfrm>
           <a:prstGeom prst="rect">
@@ -4595,7 +4639,7 @@
         </p:nvSpPr>
         <p:spPr>
           <a:xfrm>
-            <a:off x="859536" y="4562359"/>
+            <a:off x="859536" y="4745239"/>
             <a:ext cx="10619232" cy="245668"/>
           </a:xfrm>
           <a:prstGeom prst="rect">
@@ -4637,7 +4681,7 @@
         </p:nvSpPr>
         <p:spPr>
           <a:xfrm>
-            <a:off x="566928" y="5100635"/>
+            <a:off x="566928" y="5338379"/>
             <a:ext cx="11058144" cy="225704"/>
           </a:xfrm>
           <a:prstGeom prst="rect">
@@ -4679,7 +4723,7 @@
         </p:nvSpPr>
         <p:spPr>
           <a:xfrm>
-            <a:off x="566928" y="5326339"/>
+            <a:off x="566928" y="5564083"/>
             <a:ext cx="1982640" cy="274320"/>
           </a:xfrm>
           <a:prstGeom prst="roundRect">
@@ -4886,7 +4930,7 @@
         </p:nvSpPr>
         <p:spPr>
           <a:xfrm>
-            <a:off x="566928" y="1852079"/>
+            <a:off x="566928" y="1888655"/>
             <a:ext cx="11058144" cy="1609953"/>
           </a:xfrm>
           <a:prstGeom prst="rect">
@@ -5009,7 +5053,7 @@
         </p:nvSpPr>
         <p:spPr>
           <a:xfrm>
-            <a:off x="566928" y="3608336"/>
+            <a:off x="566928" y="3681488"/>
             <a:ext cx="3551936" cy="1051560"/>
           </a:xfrm>
           <a:prstGeom prst="roundRect">
@@ -5091,7 +5135,7 @@
         </p:nvSpPr>
         <p:spPr>
           <a:xfrm>
-            <a:off x="4320032" y="3608336"/>
+            <a:off x="4320032" y="3681488"/>
             <a:ext cx="3551936" cy="1051560"/>
           </a:xfrm>
           <a:prstGeom prst="roundRect">
@@ -5173,7 +5217,7 @@
         </p:nvSpPr>
         <p:spPr>
           <a:xfrm>
-            <a:off x="8073136" y="3608336"/>
+            <a:off x="8073136" y="3681488"/>
             <a:ext cx="3551936" cy="1051560"/>
           </a:xfrm>
           <a:prstGeom prst="roundRect">
@@ -5255,7 +5299,7 @@
         </p:nvSpPr>
         <p:spPr>
           <a:xfrm>
-            <a:off x="566928" y="4824488"/>
+            <a:off x="566928" y="4915928"/>
             <a:ext cx="11058144" cy="225704"/>
           </a:xfrm>
           <a:prstGeom prst="rect">
@@ -5297,7 +5341,7 @@
         </p:nvSpPr>
         <p:spPr>
           <a:xfrm>
-            <a:off x="566928" y="5050192"/>
+            <a:off x="566928" y="5141632"/>
             <a:ext cx="1326308" cy="274320"/>
           </a:xfrm>
           <a:prstGeom prst="roundRect">
@@ -5360,7 +5404,7 @@
         </p:nvSpPr>
         <p:spPr>
           <a:xfrm>
-            <a:off x="566928" y="5452528"/>
+            <a:off x="566928" y="5598832"/>
             <a:ext cx="11058144" cy="247751"/>
           </a:xfrm>
           <a:prstGeom prst="rect">
@@ -5546,7 +5590,7 @@
         </p:nvSpPr>
         <p:spPr>
           <a:xfrm>
-            <a:off x="566928" y="1852079"/>
+            <a:off x="566928" y="2108111"/>
             <a:ext cx="11058144" cy="776630"/>
           </a:xfrm>
           <a:prstGeom prst="rect">
@@ -5619,7 +5663,7 @@
         </p:nvSpPr>
         <p:spPr>
           <a:xfrm>
-            <a:off x="566928" y="2775013"/>
+            <a:off x="566928" y="3305365"/>
             <a:ext cx="11058144" cy="225704"/>
           </a:xfrm>
           <a:prstGeom prst="rect">
@@ -5661,7 +5705,7 @@
         </p:nvSpPr>
         <p:spPr>
           <a:xfrm>
-            <a:off x="566928" y="3064725"/>
+            <a:off x="566928" y="3595077"/>
             <a:ext cx="5396484" cy="1183080"/>
           </a:xfrm>
           <a:prstGeom prst="roundRect">
@@ -5709,7 +5753,7 @@
         </p:nvSpPr>
         <p:spPr>
           <a:xfrm>
-            <a:off x="713232" y="3211029"/>
+            <a:off x="713232" y="3741381"/>
             <a:ext cx="5103876" cy="187604"/>
           </a:xfrm>
           <a:prstGeom prst="rect">
@@ -5751,7 +5795,7 @@
         </p:nvSpPr>
         <p:spPr>
           <a:xfrm>
-            <a:off x="713232" y="3490073"/>
+            <a:off x="713232" y="4020425"/>
             <a:ext cx="1326308" cy="274320"/>
           </a:xfrm>
           <a:prstGeom prst="roundRect">
@@ -5814,7 +5858,7 @@
         </p:nvSpPr>
         <p:spPr>
           <a:xfrm>
-            <a:off x="713232" y="3855833"/>
+            <a:off x="713232" y="4386185"/>
             <a:ext cx="32004" cy="245668"/>
           </a:xfrm>
           <a:prstGeom prst="rect">
@@ -5858,7 +5902,7 @@
         </p:nvSpPr>
         <p:spPr>
           <a:xfrm>
-            <a:off x="859536" y="3855833"/>
+            <a:off x="859536" y="4386185"/>
             <a:ext cx="4957572" cy="245668"/>
           </a:xfrm>
           <a:prstGeom prst="rect">
@@ -5900,7 +5944,7 @@
         </p:nvSpPr>
         <p:spPr>
           <a:xfrm>
-            <a:off x="6228588" y="3064725"/>
+            <a:off x="6228588" y="3595077"/>
             <a:ext cx="5396484" cy="1183080"/>
           </a:xfrm>
           <a:prstGeom prst="roundRect">
@@ -5948,7 +5992,7 @@
         </p:nvSpPr>
         <p:spPr>
           <a:xfrm>
-            <a:off x="6374892" y="3211029"/>
+            <a:off x="6374892" y="3741381"/>
             <a:ext cx="5103876" cy="187604"/>
           </a:xfrm>
           <a:prstGeom prst="rect">
@@ -5990,7 +6034,7 @@
         </p:nvSpPr>
         <p:spPr>
           <a:xfrm>
-            <a:off x="6374892" y="3490073"/>
+            <a:off x="6374892" y="4020425"/>
             <a:ext cx="1326308" cy="274320"/>
           </a:xfrm>
           <a:prstGeom prst="roundRect">
@@ -6053,7 +6097,7 @@
         </p:nvSpPr>
         <p:spPr>
           <a:xfrm>
-            <a:off x="6374892" y="3855833"/>
+            <a:off x="6374892" y="4386185"/>
             <a:ext cx="32004" cy="245668"/>
           </a:xfrm>
           <a:prstGeom prst="rect">
@@ -6097,7 +6141,7 @@
         </p:nvSpPr>
         <p:spPr>
           <a:xfrm>
-            <a:off x="6521196" y="3855833"/>
+            <a:off x="6521196" y="4386185"/>
             <a:ext cx="4957572" cy="245668"/>
           </a:xfrm>
           <a:prstGeom prst="rect">
@@ -6139,7 +6183,7 @@
         </p:nvSpPr>
         <p:spPr>
           <a:xfrm>
-            <a:off x="566928" y="4394109"/>
+            <a:off x="566928" y="5198781"/>
             <a:ext cx="11058144" cy="225704"/>
           </a:xfrm>
           <a:prstGeom prst="rect">
@@ -6181,7 +6225,7 @@
         </p:nvSpPr>
         <p:spPr>
           <a:xfrm>
-            <a:off x="566928" y="4619813"/>
+            <a:off x="566928" y="5424485"/>
             <a:ext cx="1701355" cy="274320"/>
           </a:xfrm>
           <a:prstGeom prst="roundRect">
@@ -6388,7 +6432,7 @@
         </p:nvSpPr>
         <p:spPr>
           <a:xfrm>
-            <a:off x="566928" y="1852079"/>
+            <a:off x="566928" y="2016671"/>
             <a:ext cx="11058144" cy="1193292"/>
           </a:xfrm>
           <a:prstGeom prst="rect">
@@ -6486,7 +6530,7 @@
         </p:nvSpPr>
         <p:spPr>
           <a:xfrm>
-            <a:off x="566928" y="3191675"/>
+            <a:off x="566928" y="3828859"/>
             <a:ext cx="5396484" cy="1196186"/>
           </a:xfrm>
           <a:prstGeom prst="roundRect">
@@ -6534,7 +6578,7 @@
         </p:nvSpPr>
         <p:spPr>
           <a:xfrm>
-            <a:off x="713232" y="3337979"/>
+            <a:off x="713232" y="3975163"/>
             <a:ext cx="5103876" cy="187604"/>
           </a:xfrm>
           <a:prstGeom prst="rect">
@@ -6559,7 +6603,7 @@
             <a:r>
               <a:rPr sz="1200" b="0">
                 <a:solidFill>
-                  <a:srgbClr val="5B39F3"/>
+                  <a:srgbClr val="999999"/>
                 </a:solidFill>
                 <a:latin typeface="Fira Code"/>
               </a:rPr>
@@ -6576,7 +6620,7 @@
         </p:nvSpPr>
         <p:spPr>
           <a:xfrm>
-            <a:off x="713232" y="3589591"/>
+            <a:off x="713232" y="4226775"/>
             <a:ext cx="5103876" cy="403707"/>
           </a:xfrm>
           <a:prstGeom prst="rect">
@@ -6618,8 +6662,8 @@
         </p:nvSpPr>
         <p:spPr>
           <a:xfrm>
-            <a:off x="713232" y="4057306"/>
-            <a:ext cx="5103876" cy="184251"/>
+            <a:off x="859536" y="4694490"/>
+            <a:ext cx="4957572" cy="184251"/>
           </a:xfrm>
           <a:prstGeom prst="rect">
             <a:avLst/>
@@ -6643,7 +6687,7 @@
             <a:r>
               <a:rPr sz="1200" b="0">
                 <a:solidFill>
-                  <a:srgbClr val="999999"/>
+                  <a:srgbClr val="333333"/>
                 </a:solidFill>
                 <a:latin typeface="Inter"/>
               </a:rPr>
@@ -6660,7 +6704,7 @@
         </p:nvSpPr>
         <p:spPr>
           <a:xfrm>
-            <a:off x="6228588" y="3191675"/>
+            <a:off x="6228588" y="3828859"/>
             <a:ext cx="5396484" cy="1196186"/>
           </a:xfrm>
           <a:prstGeom prst="roundRect">
@@ -6708,7 +6752,7 @@
         </p:nvSpPr>
         <p:spPr>
           <a:xfrm>
-            <a:off x="6374892" y="3337979"/>
+            <a:off x="6374892" y="3975163"/>
             <a:ext cx="5103876" cy="187604"/>
           </a:xfrm>
           <a:prstGeom prst="rect">
@@ -6733,7 +6777,7 @@
             <a:r>
               <a:rPr sz="1200" b="0">
                 <a:solidFill>
-                  <a:srgbClr val="5B39F3"/>
+                  <a:srgbClr val="999999"/>
                 </a:solidFill>
                 <a:latin typeface="Fira Code"/>
               </a:rPr>
@@ -6750,7 +6794,7 @@
         </p:nvSpPr>
         <p:spPr>
           <a:xfrm>
-            <a:off x="6374892" y="3589591"/>
+            <a:off x="6374892" y="4226775"/>
             <a:ext cx="5103876" cy="184251"/>
           </a:xfrm>
           <a:prstGeom prst="rect">
@@ -6792,8 +6836,8 @@
         </p:nvSpPr>
         <p:spPr>
           <a:xfrm>
-            <a:off x="6374892" y="3837850"/>
-            <a:ext cx="5103876" cy="184251"/>
+            <a:off x="6521196" y="4475034"/>
+            <a:ext cx="4957572" cy="184251"/>
           </a:xfrm>
           <a:prstGeom prst="rect">
             <a:avLst/>
@@ -6817,7 +6861,7 @@
             <a:r>
               <a:rPr sz="1200" b="0">
                 <a:solidFill>
-                  <a:srgbClr val="999999"/>
+                  <a:srgbClr val="333333"/>
                 </a:solidFill>
                 <a:latin typeface="Inter"/>
               </a:rPr>
@@ -6834,7 +6878,7 @@
         </p:nvSpPr>
         <p:spPr>
           <a:xfrm>
-            <a:off x="566928" y="4534165"/>
+            <a:off x="566928" y="5354229"/>
             <a:ext cx="11058144" cy="225704"/>
           </a:xfrm>
           <a:prstGeom prst="rect">
@@ -6876,7 +6920,7 @@
         </p:nvSpPr>
         <p:spPr>
           <a:xfrm>
-            <a:off x="566928" y="4759869"/>
+            <a:off x="566928" y="5579933"/>
             <a:ext cx="1701355" cy="274320"/>
           </a:xfrm>
           <a:prstGeom prst="roundRect">
@@ -6927,6 +6971,136 @@
                 <a:latin typeface="Fira Code"/>
               </a:rPr>
               <a:t>[DUPLICATED]  36</a:t>
+            </a:r>
+          </a:p>
+        </p:txBody>
+      </p:sp>
+      <p:sp>
+        <p:nvSpPr>
+          <p:cNvPr id="11" name="Rectangle 10"/>
+          <p:cNvSpPr/>
+          <p:nvPr/>
+        </p:nvSpPr>
+        <p:spPr>
+          <a:xfrm>
+            <a:off x="713232" y="4694490"/>
+            <a:ext cx="32004" cy="184251"/>
+          </a:xfrm>
+          <a:prstGeom prst="rect">
+            <a:avLst/>
+          </a:prstGeom>
+          <a:solidFill>
+            <a:srgbClr val="5B39F3"/>
+          </a:solidFill>
+          <a:ln>
+            <a:noFill/>
+          </a:ln>
+          <a:effectLst/>
+        </p:spPr>
+        <p:style>
+          <a:lnRef idx="1">
+            <a:schemeClr val="accent1"/>
+          </a:lnRef>
+          <a:fillRef idx="3">
+            <a:schemeClr val="accent1"/>
+          </a:fillRef>
+          <a:effectRef idx="0">
+            <a:schemeClr val="accent1"/>
+          </a:effectRef>
+          <a:fontRef idx="minor">
+            <a:schemeClr val="lt1"/>
+          </a:fontRef>
+        </p:style>
+        <p:txBody>
+          <a:bodyPr rtlCol="0" anchor="ctr"/>
+          <a:lstStyle/>
+          <a:p>
+            <a:pPr algn="ctr"/>
+          </a:p>
+        </p:txBody>
+      </p:sp>
+      <p:sp>
+        <p:nvSpPr>
+          <p:cNvPr id="11" name="Rectangle 10"/>
+          <p:cNvSpPr/>
+          <p:nvPr/>
+        </p:nvSpPr>
+        <p:spPr>
+          <a:xfrm>
+            <a:off x="6374892" y="4475034"/>
+            <a:ext cx="32004" cy="184251"/>
+          </a:xfrm>
+          <a:prstGeom prst="rect">
+            <a:avLst/>
+          </a:prstGeom>
+          <a:solidFill>
+            <a:srgbClr val="5B39F3"/>
+          </a:solidFill>
+          <a:ln>
+            <a:noFill/>
+          </a:ln>
+          <a:effectLst/>
+        </p:spPr>
+        <p:style>
+          <a:lnRef idx="1">
+            <a:schemeClr val="accent1"/>
+          </a:lnRef>
+          <a:fillRef idx="3">
+            <a:schemeClr val="accent1"/>
+          </a:fillRef>
+          <a:effectRef idx="0">
+            <a:schemeClr val="accent1"/>
+          </a:effectRef>
+          <a:fontRef idx="minor">
+            <a:schemeClr val="lt1"/>
+          </a:fontRef>
+        </p:style>
+        <p:txBody>
+          <a:bodyPr rtlCol="0" anchor="ctr"/>
+          <a:lstStyle/>
+          <a:p>
+            <a:pPr algn="ctr"/>
+          </a:p>
+        </p:txBody>
+      </p:sp>
+      <p:sp>
+        <p:nvSpPr>
+          <p:cNvPr id="7" name="TextBox 6"/>
+          <p:cNvSpPr txBox="1"/>
+          <p:nvPr/>
+        </p:nvSpPr>
+        <p:spPr>
+          <a:xfrm>
+            <a:off x="566928" y="3539147"/>
+            <a:ext cx="11058144" cy="225704"/>
+          </a:xfrm>
+          <a:prstGeom prst="rect">
+            <a:avLst/>
+          </a:prstGeom>
+          <a:noFill/>
+        </p:spPr>
+        <p:txBody>
+          <a:bodyPr wrap="square" lIns="0" rIns="0" tIns="0" bIns="0" anchor="t">
+            <a:noAutofit/>
+          </a:bodyPr>
+          <a:lstStyle/>
+          <a:p>
+            <a:pPr algn="l">
+              <a:lnSpc>
+                <a:spcPct val="100000"/>
+              </a:lnSpc>
+              <a:spcAft>
+                <a:spcPts val="300"/>
+              </a:spcAft>
+            </a:pPr>
+            <a:r>
+              <a:rPr sz="1200" b="0">
+                <a:solidFill>
+                  <a:srgbClr val="999999"/>
+                </a:solidFill>
+                <a:latin typeface="Fira Code"/>
+              </a:rPr>
+              <a:t>EACH CARD: WHAT DIVERGES, THEN THE AUDIT’S OWN WORDING</a:t>
             </a:r>
           </a:p>
         </p:txBody>
@@ -7083,7 +7257,7 @@
         </p:nvSpPr>
         <p:spPr>
           <a:xfrm>
-            <a:off x="566928" y="1852079"/>
+            <a:off x="566928" y="1998383"/>
             <a:ext cx="11058144" cy="1912315"/>
           </a:xfrm>
           <a:prstGeom prst="rect">
@@ -7206,7 +7380,7 @@
         </p:nvSpPr>
         <p:spPr>
           <a:xfrm>
-            <a:off x="566928" y="3910698"/>
+            <a:off x="566928" y="4221594"/>
             <a:ext cx="11058144" cy="225704"/>
           </a:xfrm>
           <a:prstGeom prst="rect">
@@ -7248,7 +7422,7 @@
         </p:nvSpPr>
         <p:spPr>
           <a:xfrm>
-            <a:off x="566928" y="4136402"/>
+            <a:off x="566928" y="4447298"/>
             <a:ext cx="1982640" cy="274320"/>
           </a:xfrm>
           <a:prstGeom prst="roundRect">
@@ -7311,7 +7485,7 @@
         </p:nvSpPr>
         <p:spPr>
           <a:xfrm>
-            <a:off x="2668440" y="4136402"/>
+            <a:off x="2668440" y="4447298"/>
             <a:ext cx="1701355" cy="274320"/>
           </a:xfrm>
           <a:prstGeom prst="roundRect">
@@ -7374,7 +7548,7 @@
         </p:nvSpPr>
         <p:spPr>
           <a:xfrm>
-            <a:off x="4488667" y="4136402"/>
+            <a:off x="4488667" y="4447298"/>
             <a:ext cx="1420070" cy="274320"/>
           </a:xfrm>
           <a:prstGeom prst="roundRect">
@@ -7437,7 +7611,7 @@
         </p:nvSpPr>
         <p:spPr>
           <a:xfrm>
-            <a:off x="566928" y="4611890"/>
+            <a:off x="566928" y="5032514"/>
             <a:ext cx="11058144" cy="32004"/>
           </a:xfrm>
           <a:prstGeom prst="rect">
@@ -7481,7 +7655,7 @@
         </p:nvSpPr>
         <p:spPr>
           <a:xfrm>
-            <a:off x="566928" y="4790198"/>
+            <a:off x="566928" y="5375414"/>
             <a:ext cx="11058144" cy="463550"/>
           </a:xfrm>
           <a:prstGeom prst="rect">

--- a/blitzy/presentations/ArduPilot_PNT_Reference_Audit_Executive_Brief.pptx
+++ b/blitzy/presentations/ArduPilot_PNT_Reference_Audit_Executive_Brief.pptx
@@ -262,11 +262,11 @@
             <a:r>
               <a:rPr sz="1000" b="0">
                 <a:solidFill>
-                  <a:srgbClr val="999999"/>
+                  <a:srgbClr val="333333"/>
                 </a:solidFill>
                 <a:latin typeface="Fira Code"/>
               </a:rPr>
-              <a:t>Source: ArduPilot_PNT_Reference_Audit.pdf  ·  audited HEAD 5b67e27b0a  ·  read-only static-analysis catalog  ·  every figure as stated</a:t>
+              <a:t>Source: ArduPilot_PNT_Reference_Audit.pdf  ·  audited HEAD 5b67e27b0a  ·  read-only static-analysis catalog  ·  every audit figure as stated</a:t>
             </a:r>
           </a:p>
         </p:txBody>
@@ -345,6 +345,33 @@
           <a:chExt cx="0" cy="0"/>
         </a:xfrm>
       </p:grpSpPr>
+      <p:sp>
+        <p:nvSpPr>
+          <p:cNvPr id="2" name="Closing full-bleed fill"/>
+          <p:cNvSpPr/>
+          <p:nvPr/>
+        </p:nvSpPr>
+        <p:spPr>
+          <a:xfrm>
+            <a:off x="0" y="0"/>
+            <a:ext cx="12198350" cy="6864350"/>
+          </a:xfrm>
+          <a:prstGeom prst="rect">
+            <a:avLst/>
+          </a:prstGeom>
+          <a:solidFill>
+            <a:srgbClr val="1A105F"/>
+          </a:solidFill>
+          <a:ln>
+            <a:noFill/>
+          </a:ln>
+        </p:spPr>
+        <p:txBody>
+          <a:bodyPr/>
+          <a:lstStyle/>
+          <a:p/>
+        </p:txBody>
+      </p:sp>
     </p:spTree>
   </p:cSld>
   <p:clrMapOvr>
@@ -1014,7 +1041,7 @@
                 </a:solidFill>
                 <a:latin typeface="Inter"/>
               </a:rPr>
-              <a:t>The audit-discipline flags turn extraction risk into explicit, addressable markers</a:t>
+              <a:t>The audit-discipline flags turn extraction risk into explicit, addressable markers.</a:t>
             </a:r>
           </a:p>
           <a:p>
@@ -1039,7 +1066,7 @@
                 </a:solidFill>
                 <a:latin typeface="Inter"/>
               </a:rPr>
-              <a:t>For the L1-navigation slice the current → new mapping supplies a documented wiring contract for the reusable service</a:t>
+              <a:t>For the L1-navigation slice the current → new mapping supplies a documented wiring contract for the reusable service.</a:t>
             </a:r>
           </a:p>
         </p:txBody>
@@ -6649,7 +6676,26 @@
                 </a:solidFill>
                 <a:latin typeface="Inter"/>
               </a:rPr>
-              <a:t>2 s → motor minimum: Copter (which also disarms), Sub, Blimp. 0.2 s → Plane RC-passthrough; Rover disarm (CPUFAILSAFE).</a:t>
+              <a:t>2 s → motor minimum: Copter (which also disarms), Sub, Blimp.</a:t>
+            </a:r>
+          </a:p>
+          <a:p>
+            <a:pPr algn="l">
+              <a:lnSpc>
+                <a:spcPct val="120000"/>
+              </a:lnSpc>
+              <a:spcAft>
+                <a:spcPts val="0"/>
+              </a:spcAft>
+            </a:pPr>
+            <a:r>
+              <a:rPr sz="1200" b="0">
+                <a:solidFill>
+                  <a:srgbClr val="333333"/>
+                </a:solidFill>
+                <a:latin typeface="Inter"/>
+              </a:rPr>
+              <a:t>0.2 s → Plane RC-passthrough; Rover disarm (CPUFAILSAFE).</a:t>
             </a:r>
           </a:p>
         </p:txBody>
@@ -6907,7 +6953,7 @@
                 </a:solidFill>
                 <a:latin typeface="Fira Code"/>
               </a:rPr>
-              <a:t>CATALOG-WIDE FLAG COUNTS</a:t>
+              <a:t>CATALOG-WIDE FLAG COUNT</a:t>
             </a:r>
           </a:p>
         </p:txBody>
@@ -7276,7 +7322,7 @@
                 <a:spcPct val="124000"/>
               </a:lnSpc>
               <a:spcAft>
-                <a:spcPts val="900"/>
+                <a:spcPts val="0"/>
               </a:spcAft>
               <a:buClr>
                 <a:srgbClr val="333333"/>
@@ -7292,7 +7338,27 @@
                 </a:solidFill>
                 <a:latin typeface="Inter"/>
               </a:rPr>
-              <a:t>Treat the audit’s own 12-row service mapping as the wiring contract: “the value the host must inject and the service member that now supplies it”.</a:t>
+              <a:t>Treat the audit’s own 12-row service mapping as the wiring contract:</a:t>
+            </a:r>
+          </a:p>
+          <a:p>
+            <a:pPr algn="l" marL="228600" indent="0">
+              <a:lnSpc>
+                <a:spcPct val="124000"/>
+              </a:lnSpc>
+              <a:spcAft>
+                <a:spcPts val="900"/>
+              </a:spcAft>
+              <a:buNone/>
+            </a:pPr>
+            <a:r>
+              <a:rPr sz="1600" b="0">
+                <a:solidFill>
+                  <a:srgbClr val="333333"/>
+                </a:solidFill>
+                <a:latin typeface="Inter"/>
+              </a:rPr>
+              <a:t>“the value the host must inject and the service member that now supplies it”.</a:t>
             </a:r>
           </a:p>
           <a:p>
@@ -7680,11 +7746,30 @@
             <a:r>
               <a:rPr sz="1200" b="0">
                 <a:solidFill>
-                  <a:srgbClr val="999999"/>
+                  <a:srgbClr val="333333"/>
                 </a:solidFill>
                 <a:latin typeface="Inter"/>
               </a:rPr>
-              <a:t>Traceability: the audit contains no numbered recommendations register and no numeric severity scale, so every item above traces to its current → new service mapping, to its Audit-Discipline Flags taxonomy, or to its Provenance statement.</a:t>
+              <a:t>Traceability: the audit contains no numbered recommendations register and no numeric severity scale.</a:t>
+            </a:r>
+          </a:p>
+          <a:p>
+            <a:pPr algn="l">
+              <a:lnSpc>
+                <a:spcPct val="118000"/>
+              </a:lnSpc>
+              <a:spcAft>
+                <a:spcPts val="500"/>
+              </a:spcAft>
+            </a:pPr>
+            <a:r>
+              <a:rPr sz="1200" b="0">
+                <a:solidFill>
+                  <a:srgbClr val="333333"/>
+                </a:solidFill>
+                <a:latin typeface="Inter"/>
+              </a:rPr>
+              <a:t>Every item above traces to its current → new service mapping, to its Audit-Discipline Flags taxonomy, or to its Provenance statement.</a:t>
             </a:r>
           </a:p>
         </p:txBody>
